--- a/presentation.pptx
+++ b/presentation.pptx
@@ -4,6 +4,9 @@
   <p:sldMasterIdLst>
     <p:sldMasterId id="2147483648" r:id="rId1"/>
   </p:sldMasterIdLst>
+  <p:notesMasterIdLst>
+    <p:notesMasterId r:id="rId15"/>
+  </p:notesMasterIdLst>
   <p:sldIdLst>
     <p:sldId id="256" r:id="rId2"/>
     <p:sldId id="257" r:id="rId3"/>
@@ -19,9 +22,6 @@
     <p:sldId id="267" r:id="rId13"/>
     <p:sldId id="268" r:id="rId14"/>
   </p:sldIdLst>
-  <p:notesMasterIdLst>
-    <p:notesMasterId r:id="rId15"/>
-  </p:notesMasterIdLst>
   <p:sldSz cx="12192000" cy="6858000"/>
   <p:notesSz cx="6858000" cy="12192000"/>
   <p:defaultTextStyle>
@@ -116,13 +116,20 @@
       </a:defRPr>
     </a:lvl9pPr>
   </p:defaultTextStyle>
+  <p:extLst>
+    <p:ext uri="{EFAFB233-063F-42B5-8137-9DF3F51BA10A}">
+      <p15:sldGuideLst xmlns:p15="http://schemas.microsoft.com/office/powerpoint/2012/main"/>
+    </p:ext>
+  </p:extLst>
 </p:presentation>
 </file>
 
 <file path=ppt/charts/chart1.xml><?xml version="1.0" encoding="utf-8"?>
-<c:chartSpace xmlns:c="http://schemas.openxmlformats.org/drawingml/2006/chart" xmlns:a="http://schemas.openxmlformats.org/drawingml/2006/main" xmlns:r="http://schemas.openxmlformats.org/officeDocument/2006/relationships">
+<c:chartSpace xmlns:c="http://schemas.openxmlformats.org/drawingml/2006/chart" xmlns:a="http://schemas.openxmlformats.org/drawingml/2006/main" xmlns:r="http://schemas.openxmlformats.org/officeDocument/2006/relationships" xmlns:c16r2="http://schemas.microsoft.com/office/drawing/2015/06/chart">
   <c:date1904 val="0"/>
+  <c:lang val="zh-CN"/>
   <c:roundedCorners val="1"/>
+  <c:style val="2"/>
   <c:chart>
     <c:autoTitleDeleted val="1"/>
     <c:plotArea>
@@ -154,30 +161,6 @@
             <a:effectLst/>
           </c:spPr>
           <c:invertIfNegative val="0"/>
-          <c:dLbls>
-            <c:numFmt formatCode="0.000" sourceLinked="0"/>
-            <c:txPr>
-              <a:bodyPr/>
-              <a:lstStyle/>
-              <a:p>
-                <a:pPr>
-                  <a:defRPr b="1" i="0" strike="noStrike" sz="1400" u="none">
-                    <a:solidFill>
-                      <a:srgbClr val="1E2761"/>
-                    </a:solidFill>
-                    <a:latin typeface="Arial"/>
-                  </a:defRPr>
-                </a:pPr>
-              </a:p>
-            </c:txPr>
-            <c:showLegendKey val="0"/>
-            <c:showVal val="1"/>
-            <c:showCatName val="0"/>
-            <c:showSerName val="0"/>
-            <c:showPercent val="0"/>
-            <c:showBubbleSize val="0"/>
-            <c:showLeaderLines val="0"/>
-          </c:dLbls>
           <c:dPt>
             <c:idx val="0"/>
             <c:invertIfNegative val="0"/>
@@ -188,6 +171,11 @@
               </a:solidFill>
               <a:effectLst/>
             </c:spPr>
+            <c:extLst>
+              <c:ext xmlns:c16="http://schemas.microsoft.com/office/drawing/2014/chart" uri="{C3380CC4-5D6E-409C-BE32-E72D297353CC}">
+                <c16:uniqueId val="{00000001-7AF8-A944-9481-AF26B381C35A}"/>
+              </c:ext>
+            </c:extLst>
           </c:dPt>
           <c:dPt>
             <c:idx val="1"/>
@@ -199,6 +187,11 @@
               </a:solidFill>
               <a:effectLst/>
             </c:spPr>
+            <c:extLst>
+              <c:ext xmlns:c16="http://schemas.microsoft.com/office/drawing/2014/chart" uri="{C3380CC4-5D6E-409C-BE32-E72D297353CC}">
+                <c16:uniqueId val="{00000003-7AF8-A944-9481-AF26B381C35A}"/>
+              </c:ext>
+            </c:extLst>
           </c:dPt>
           <c:dPt>
             <c:idx val="2"/>
@@ -210,6 +203,11 @@
               </a:solidFill>
               <a:effectLst/>
             </c:spPr>
+            <c:extLst>
+              <c:ext xmlns:c16="http://schemas.microsoft.com/office/drawing/2014/chart" uri="{C3380CC4-5D6E-409C-BE32-E72D297353CC}">
+                <c16:uniqueId val="{00000005-7AF8-A944-9481-AF26B381C35A}"/>
+              </c:ext>
+            </c:extLst>
           </c:dPt>
           <c:dPt>
             <c:idx val="3"/>
@@ -221,28 +219,68 @@
               </a:solidFill>
               <a:effectLst/>
             </c:spPr>
+            <c:extLst>
+              <c:ext xmlns:c16="http://schemas.microsoft.com/office/drawing/2014/chart" uri="{C3380CC4-5D6E-409C-BE32-E72D297353CC}">
+                <c16:uniqueId val="{00000007-7AF8-A944-9481-AF26B381C35A}"/>
+              </c:ext>
+            </c:extLst>
           </c:dPt>
+          <c:dLbls>
+            <c:numFmt formatCode="0.000" sourceLinked="0"/>
+            <c:spPr>
+              <a:noFill/>
+              <a:ln>
+                <a:noFill/>
+              </a:ln>
+              <a:effectLst/>
+            </c:spPr>
+            <c:txPr>
+              <a:bodyPr/>
+              <a:lstStyle/>
+              <a:p>
+                <a:pPr>
+                  <a:defRPr sz="1400" b="1" i="0" u="none" strike="noStrike">
+                    <a:solidFill>
+                      <a:srgbClr val="1E2761"/>
+                    </a:solidFill>
+                    <a:latin typeface="Arial"/>
+                  </a:defRPr>
+                </a:pPr>
+                <a:endParaRPr lang="zh-CN"/>
+              </a:p>
+            </c:txPr>
+            <c:showLegendKey val="0"/>
+            <c:showVal val="1"/>
+            <c:showCatName val="0"/>
+            <c:showSerName val="0"/>
+            <c:showPercent val="0"/>
+            <c:showBubbleSize val="0"/>
+            <c:showLeaderLines val="0"/>
+            <c:extLst>
+              <c:ext xmlns:c15="http://schemas.microsoft.com/office/drawing/2012/chart" uri="{CE6537A1-D6FC-4f65-9D91-7224C49458BB}">
+                <c15:showLeaderLines val="0"/>
+              </c:ext>
+            </c:extLst>
+          </c:dLbls>
           <c:cat>
-            <c:multiLvlStrRef>
+            <c:strRef>
               <c:f>Sheet1!$A$2:$A$5</c:f>
-              <c:multiLvlStrCache>
+              <c:strCache>
                 <c:ptCount val="4"/>
-                <c:lvl>
-                  <c:pt idx="0">
-                    <c:v>Naive Baseline</c:v>
-                  </c:pt>
-                  <c:pt idx="1">
-                    <c:v>A: Scratch</c:v>
-                  </c:pt>
-                  <c:pt idx="2">
-                    <c:v>B: ImageNet</c:v>
-                  </c:pt>
-                  <c:pt idx="3">
-                    <c:v>C: ISIC Pretrain</c:v>
-                  </c:pt>
-                </c:lvl>
-              </c:multiLvlStrCache>
-            </c:multiLvlStrRef>
+                <c:pt idx="0">
+                  <c:v>Naive Baseline</c:v>
+                </c:pt>
+                <c:pt idx="1">
+                  <c:v>A: Scratch</c:v>
+                </c:pt>
+                <c:pt idx="2">
+                  <c:v>B: ImageNet</c:v>
+                </c:pt>
+                <c:pt idx="3">
+                  <c:v>C: ISIC Pretrain</c:v>
+                </c:pt>
+              </c:strCache>
+            </c:strRef>
           </c:cat>
           <c:val>
             <c:numRef>
@@ -251,50 +289,37 @@
                 <c:formatCode>General</c:formatCode>
                 <c:ptCount val="4"/>
                 <c:pt idx="0">
-                  <c:v>0.139</c:v>
+                  <c:v>0.13900000000000001</c:v>
                 </c:pt>
                 <c:pt idx="1">
-                  <c:v>0.728</c:v>
+                  <c:v>0.72799999999999998</c:v>
                 </c:pt>
                 <c:pt idx="2">
-                  <c:v>0.718</c:v>
+                  <c:v>0.71799999999999997</c:v>
                 </c:pt>
                 <c:pt idx="3">
-                  <c:v>0.721</c:v>
+                  <c:v>0.72099999999999997</c:v>
                 </c:pt>
               </c:numCache>
             </c:numRef>
           </c:val>
+          <c:extLst>
+            <c:ext xmlns:c16="http://schemas.microsoft.com/office/drawing/2014/chart" uri="{C3380CC4-5D6E-409C-BE32-E72D297353CC}">
+              <c16:uniqueId val="{00000008-7AF8-A944-9481-AF26B381C35A}"/>
+            </c:ext>
+          </c:extLst>
         </c:ser>
         <c:dLbls>
-          <c:numFmt formatCode="0.000" sourceLinked="0"/>
-          <c:txPr>
-            <a:bodyPr/>
-            <a:lstStyle/>
-            <a:p>
-              <a:pPr>
-                <a:defRPr b="1" i="0" strike="noStrike" sz="1400" u="none">
-                  <a:solidFill>
-                    <a:srgbClr val="1E2761"/>
-                  </a:solidFill>
-                  <a:latin typeface="Arial"/>
-                </a:defRPr>
-              </a:pPr>
-            </a:p>
-          </c:txPr>
           <c:showLegendKey val="0"/>
           <c:showVal val="1"/>
           <c:showCatName val="0"/>
           <c:showSerName val="0"/>
           <c:showPercent val="0"/>
           <c:showBubbleSize val="0"/>
-          <c:showLeaderLines val="0"/>
         </c:dLbls>
         <c:gapWidth val="150"/>
-        <c:overlap val="0"/>
         <c:axId val="2094734554"/>
         <c:axId val="2094734552"/>
-        <c:axId val="2094734556"/>
       </c:barChart>
       <c:catAx>
         <c:axId val="2094734554"/>
@@ -335,6 +360,7 @@
         <c:crosses val="autoZero"/>
         <c:auto val="1"/>
         <c:lblAlgn val="ctr"/>
+        <c:lblOffset val="100"/>
         <c:noMultiLvlLbl val="1"/>
       </c:catAx>
       <c:valAx>
@@ -399,6 +425,7 @@
     </c:plotArea>
     <c:plotVisOnly val="1"/>
     <c:dispBlanksAs val="span"/>
+    <c:showDLblsOverMax val="1"/>
   </c:chart>
   <c:spPr>
     <a:solidFill>
@@ -437,234 +464,10 @@
           <a:chExt cx="0" cy="0"/>
         </a:xfrm>
       </p:grpSpPr>
-      <p:sp>
-        <p:nvSpPr>
-          <p:cNvPr id="2" name="Header Placeholder 1"/>
-          <p:cNvSpPr>
-            <a:spLocks noGrp="1"/>
-          </p:cNvSpPr>
-          <p:nvPr>
-            <p:ph type="hdr" sz="quarter"/>
-          </p:nvPr>
-        </p:nvSpPr>
-        <p:spPr>
-          <a:xfrm>
-            <a:off x="0" y="0"/>
-            <a:ext cx="2971800" cy="458788"/>
-          </a:xfrm>
-          <a:prstGeom prst="rect">
-            <a:avLst/>
-          </a:prstGeom>
-        </p:spPr>
-        <p:txBody>
-          <a:bodyPr vert="horz" lIns="91440" tIns="45720" rIns="91440" bIns="45720" rtlCol="0"/>
-          <a:lstStyle>
-            <a:lvl1pPr algn="l">
-              <a:defRPr sz="1200"/>
-            </a:lvl1pPr>
-          </a:lstStyle>
-          <a:p>
-            <a:endParaRPr lang="en-US"/>
-          </a:p>
-        </p:txBody>
-      </p:sp>
-      <p:sp>
-        <p:nvSpPr>
-          <p:cNvPr id="3" name="Date Placeholder 2"/>
-          <p:cNvSpPr>
-            <a:spLocks noGrp="1"/>
-          </p:cNvSpPr>
-          <p:nvPr>
-            <p:ph type="dt" idx="1"/>
-          </p:nvPr>
-        </p:nvSpPr>
-        <p:spPr>
-          <a:xfrm>
-            <a:off x="3884613" y="0"/>
-            <a:ext cx="2971800" cy="458788"/>
-          </a:xfrm>
-          <a:prstGeom prst="rect">
-            <a:avLst/>
-          </a:prstGeom>
-        </p:spPr>
-        <p:txBody>
-          <a:bodyPr vert="horz" lIns="91440" tIns="45720" rIns="91440" bIns="45720" rtlCol="0"/>
-          <a:lstStyle>
-            <a:lvl1pPr algn="r">
-              <a:defRPr sz="1200"/>
-            </a:lvl1pPr>
-          </a:lstStyle>
-          <a:p>
-            <a:fld id="{5282F153-3F37-0F45-9E97-73ACFA13230C}" type="datetimeFigureOut">
-              <a:rPr lang="en-US"/>
-              <a:t>7/23/19</a:t>
-            </a:fld>
-            <a:endParaRPr lang="en-US"/>
-          </a:p>
-        </p:txBody>
-      </p:sp>
-      <p:sp>
-        <p:nvSpPr>
-          <p:cNvPr id="4" name="Slide Image Placeholder 3"/>
-          <p:cNvSpPr>
-            <a:spLocks noGrp="1" noRot="1" noChangeAspect="1"/>
-          </p:cNvSpPr>
-          <p:nvPr>
-            <p:ph type="sldImg" idx="2"/>
-          </p:nvPr>
-        </p:nvSpPr>
-        <p:spPr>
-          <a:xfrm>
-            <a:off x="685800" y="1143000"/>
-            <a:ext cx="5486400" cy="3086100"/>
-          </a:xfrm>
-          <a:prstGeom prst="rect">
-            <a:avLst/>
-          </a:prstGeom>
-          <a:noFill/>
-          <a:ln w="12700">
-            <a:solidFill>
-              <a:prstClr val="black"/>
-            </a:solidFill>
-          </a:ln>
-        </p:spPr>
-        <p:txBody>
-          <a:bodyPr vert="horz" lIns="91440" tIns="45720" rIns="91440" bIns="45720" rtlCol="0" anchor="ctr"/>
-          <a:lstStyle/>
-          <a:p>
-            <a:endParaRPr lang="en-US"/>
-          </a:p>
-        </p:txBody>
-      </p:sp>
-      <p:sp>
-        <p:nvSpPr>
-          <p:cNvPr id="5" name="Notes Placeholder 4"/>
-          <p:cNvSpPr>
-            <a:spLocks noGrp="1"/>
-          </p:cNvSpPr>
-          <p:nvPr>
-            <p:ph type="body" sz="quarter" idx="3"/>
-          </p:nvPr>
-        </p:nvSpPr>
-        <p:spPr>
-          <a:xfrm>
-            <a:off x="685800" y="4400550"/>
-            <a:ext cx="5486400" cy="3600450"/>
-          </a:xfrm>
-          <a:prstGeom prst="rect">
-            <a:avLst/>
-          </a:prstGeom>
-        </p:spPr>
-        <p:txBody>
-          <a:bodyPr vert="horz" lIns="91440" tIns="45720" rIns="91440" bIns="45720" rtlCol="0"/>
-          <a:lstStyle/>
-          <a:p>
-            <a:pPr lvl="0"/>
-            <a:r>
-              <a:rPr lang="en-US"/>
-              <a:t>Click to edit Master text styles</a:t>
-            </a:r>
-          </a:p>
-          <a:p>
-            <a:pPr lvl="1"/>
-            <a:r>
-              <a:rPr lang="en-US"/>
-              <a:t>Second level</a:t>
-            </a:r>
-          </a:p>
-          <a:p>
-            <a:pPr lvl="2"/>
-            <a:r>
-              <a:rPr lang="en-US"/>
-              <a:t>Third level</a:t>
-            </a:r>
-          </a:p>
-          <a:p>
-            <a:pPr lvl="3"/>
-            <a:r>
-              <a:rPr lang="en-US"/>
-              <a:t>Fourth level</a:t>
-            </a:r>
-          </a:p>
-          <a:p>
-            <a:pPr lvl="4"/>
-            <a:r>
-              <a:rPr lang="en-US"/>
-              <a:t>Fifth level</a:t>
-            </a:r>
-          </a:p>
-        </p:txBody>
-      </p:sp>
-      <p:sp>
-        <p:nvSpPr>
-          <p:cNvPr id="6" name="Footer Placeholder 5"/>
-          <p:cNvSpPr>
-            <a:spLocks noGrp="1"/>
-          </p:cNvSpPr>
-          <p:nvPr>
-            <p:ph type="ftr" sz="quarter" idx="4"/>
-          </p:nvPr>
-        </p:nvSpPr>
-        <p:spPr>
-          <a:xfrm>
-            <a:off x="0" y="8685213"/>
-            <a:ext cx="2971800" cy="458787"/>
-          </a:xfrm>
-          <a:prstGeom prst="rect">
-            <a:avLst/>
-          </a:prstGeom>
-        </p:spPr>
-        <p:txBody>
-          <a:bodyPr vert="horz" lIns="91440" tIns="45720" rIns="91440" bIns="45720" rtlCol="0" anchor="b"/>
-          <a:lstStyle>
-            <a:lvl1pPr algn="l">
-              <a:defRPr sz="1200"/>
-            </a:lvl1pPr>
-          </a:lstStyle>
-          <a:p>
-            <a:endParaRPr lang="en-US"/>
-          </a:p>
-        </p:txBody>
-      </p:sp>
-      <p:sp>
-        <p:nvSpPr>
-          <p:cNvPr id="7" name="Slide Number Placeholder 6"/>
-          <p:cNvSpPr>
-            <a:spLocks noGrp="1"/>
-          </p:cNvSpPr>
-          <p:nvPr>
-            <p:ph type="sldNum" sz="quarter" idx="5"/>
-          </p:nvPr>
-        </p:nvSpPr>
-        <p:spPr>
-          <a:xfrm>
-            <a:off x="3884613" y="8685213"/>
-            <a:ext cx="2971800" cy="458787"/>
-          </a:xfrm>
-          <a:prstGeom prst="rect">
-            <a:avLst/>
-          </a:prstGeom>
-        </p:spPr>
-        <p:txBody>
-          <a:bodyPr vert="horz" lIns="91440" tIns="45720" rIns="91440" bIns="45720" rtlCol="0" anchor="b"/>
-          <a:lstStyle>
-            <a:lvl1pPr algn="r">
-              <a:defRPr sz="1200"/>
-            </a:lvl1pPr>
-          </a:lstStyle>
-          <a:p>
-            <a:fld id="{CE5E9CC1-C706-0F49-92D6-E571CC5EEA8F}" type="slidenum">
-              <a:rPr lang="en-US"/>
-              <a:t>‹#›</a:t>
-            </a:fld>
-            <a:endParaRPr lang="en-US"/>
-          </a:p>
-        </p:txBody>
-      </p:sp>
     </p:spTree>
     <p:extLst>
       <p:ext uri="{BB962C8B-B14F-4D97-AF65-F5344CB8AC3E}">
-        <p14:creationId xmlns:p14="http://schemas.microsoft.com/office/powerpoint/2010/main" val="1024086991"/>
+        <p14:creationId xmlns:p14="http://schemas.microsoft.com/office/powerpoint/2010/main" val="674331055"/>
       </p:ext>
     </p:extLst>
   </p:cSld>
@@ -808,10 +611,6 @@
           <a:bodyPr/>
           <a:lstStyle/>
           <a:p>
-            <a:r>
-              <a:rPr lang="en-US" dirty="0"/>
-              <a:t/>
-            </a:r>
             <a:endParaRPr lang="en-US" dirty="0"/>
           </a:p>
         </p:txBody>
@@ -896,10 +695,6 @@
           <a:bodyPr/>
           <a:lstStyle/>
           <a:p>
-            <a:r>
-              <a:rPr lang="en-US" dirty="0"/>
-              <a:t/>
-            </a:r>
             <a:endParaRPr lang="en-US" dirty="0"/>
           </a:p>
         </p:txBody>
@@ -984,10 +779,6 @@
           <a:bodyPr/>
           <a:lstStyle/>
           <a:p>
-            <a:r>
-              <a:rPr lang="en-US" dirty="0"/>
-              <a:t/>
-            </a:r>
             <a:endParaRPr lang="en-US" dirty="0"/>
           </a:p>
         </p:txBody>
@@ -1072,10 +863,6 @@
           <a:bodyPr/>
           <a:lstStyle/>
           <a:p>
-            <a:r>
-              <a:rPr lang="en-US" dirty="0"/>
-              <a:t/>
-            </a:r>
             <a:endParaRPr lang="en-US" dirty="0"/>
           </a:p>
         </p:txBody>
@@ -1160,10 +947,6 @@
           <a:bodyPr/>
           <a:lstStyle/>
           <a:p>
-            <a:r>
-              <a:rPr lang="en-US" dirty="0"/>
-              <a:t/>
-            </a:r>
             <a:endParaRPr lang="en-US" dirty="0"/>
           </a:p>
         </p:txBody>
@@ -1248,10 +1031,6 @@
           <a:bodyPr/>
           <a:lstStyle/>
           <a:p>
-            <a:r>
-              <a:rPr lang="en-US" dirty="0"/>
-              <a:t/>
-            </a:r>
             <a:endParaRPr lang="en-US" dirty="0"/>
           </a:p>
         </p:txBody>
@@ -1336,10 +1115,6 @@
           <a:bodyPr/>
           <a:lstStyle/>
           <a:p>
-            <a:r>
-              <a:rPr lang="en-US" dirty="0"/>
-              <a:t/>
-            </a:r>
             <a:endParaRPr lang="en-US" dirty="0"/>
           </a:p>
         </p:txBody>
@@ -1424,10 +1199,6 @@
           <a:bodyPr/>
           <a:lstStyle/>
           <a:p>
-            <a:r>
-              <a:rPr lang="en-US" dirty="0"/>
-              <a:t/>
-            </a:r>
             <a:endParaRPr lang="en-US" dirty="0"/>
           </a:p>
         </p:txBody>
@@ -1512,10 +1283,6 @@
           <a:bodyPr/>
           <a:lstStyle/>
           <a:p>
-            <a:r>
-              <a:rPr lang="en-US" dirty="0"/>
-              <a:t/>
-            </a:r>
             <a:endParaRPr lang="en-US" dirty="0"/>
           </a:p>
         </p:txBody>
@@ -1600,10 +1367,6 @@
           <a:bodyPr/>
           <a:lstStyle/>
           <a:p>
-            <a:r>
-              <a:rPr lang="en-US" dirty="0"/>
-              <a:t/>
-            </a:r>
             <a:endParaRPr lang="en-US" dirty="0"/>
           </a:p>
         </p:txBody>
@@ -1688,10 +1451,6 @@
           <a:bodyPr/>
           <a:lstStyle/>
           <a:p>
-            <a:r>
-              <a:rPr lang="en-US" dirty="0"/>
-              <a:t/>
-            </a:r>
             <a:endParaRPr lang="en-US" dirty="0"/>
           </a:p>
         </p:txBody>
@@ -1776,10 +1535,6 @@
           <a:bodyPr/>
           <a:lstStyle/>
           <a:p>
-            <a:r>
-              <a:rPr lang="en-US" dirty="0"/>
-              <a:t/>
-            </a:r>
             <a:endParaRPr lang="en-US" dirty="0"/>
           </a:p>
         </p:txBody>
@@ -1864,10 +1619,6 @@
           <a:bodyPr/>
           <a:lstStyle/>
           <a:p>
-            <a:r>
-              <a:rPr lang="en-US" dirty="0"/>
-              <a:t/>
-            </a:r>
             <a:endParaRPr lang="en-US" dirty="0"/>
           </a:p>
         </p:txBody>
@@ -1941,6 +1692,11 @@
 <file path=ppt/slideMasters/slideMaster1.xml><?xml version="1.0" encoding="utf-8"?>
 <p:sldMaster xmlns:a="http://schemas.openxmlformats.org/drawingml/2006/main" xmlns:r="http://schemas.openxmlformats.org/officeDocument/2006/relationships" xmlns:p="http://schemas.openxmlformats.org/presentationml/2006/main">
   <p:cSld>
+    <p:bg>
+      <p:bgRef idx="1001">
+        <a:schemeClr val="bg1"/>
+      </p:bgRef>
+    </p:bg>
     <p:spTree>
       <p:nvGrpSpPr>
         <p:cNvPr id="1" name=""/>
@@ -2223,6 +1979,7 @@
         <a:solidFill>
           <a:srgbClr val="1E2761"/>
         </a:solidFill>
+        <a:effectLst/>
       </p:bgPr>
     </p:bg>
     <p:spTree>
@@ -2260,6 +2017,13 @@
           </a:solidFill>
           <a:ln/>
         </p:spPr>
+        <p:txBody>
+          <a:bodyPr/>
+          <a:lstStyle/>
+          <a:p>
+            <a:endParaRPr lang="zh-CN" altLang="en-US"/>
+          </a:p>
+        </p:txBody>
       </p:sp>
       <p:sp>
         <p:nvSpPr>
@@ -2282,6 +2046,13 @@
           </a:solidFill>
           <a:ln/>
         </p:spPr>
+        <p:txBody>
+          <a:bodyPr/>
+          <a:lstStyle/>
+          <a:p>
+            <a:endParaRPr lang="zh-CN" altLang="en-US"/>
+          </a:p>
+        </p:txBody>
       </p:sp>
       <p:sp>
         <p:nvSpPr>
@@ -2304,6 +2075,13 @@
           </a:solidFill>
           <a:ln/>
         </p:spPr>
+        <p:txBody>
+          <a:bodyPr/>
+          <a:lstStyle/>
+          <a:p>
+            <a:endParaRPr lang="zh-CN" altLang="en-US"/>
+          </a:p>
+        </p:txBody>
       </p:sp>
       <p:sp>
         <p:nvSpPr>
@@ -2326,6 +2104,13 @@
           </a:solidFill>
           <a:ln/>
         </p:spPr>
+        <p:txBody>
+          <a:bodyPr/>
+          <a:lstStyle/>
+          <a:p>
+            <a:endParaRPr lang="zh-CN" altLang="en-US"/>
+          </a:p>
+        </p:txBody>
       </p:sp>
       <p:sp>
         <p:nvSpPr>
@@ -2348,6 +2133,13 @@
           </a:solidFill>
           <a:ln/>
         </p:spPr>
+        <p:txBody>
+          <a:bodyPr/>
+          <a:lstStyle/>
+          <a:p>
+            <a:endParaRPr lang="zh-CN" altLang="en-US"/>
+          </a:p>
+        </p:txBody>
       </p:sp>
       <p:sp>
         <p:nvSpPr>
@@ -2370,6 +2162,13 @@
           </a:solidFill>
           <a:ln/>
         </p:spPr>
+        <p:txBody>
+          <a:bodyPr/>
+          <a:lstStyle/>
+          <a:p>
+            <a:endParaRPr lang="zh-CN" altLang="en-US"/>
+          </a:p>
+        </p:txBody>
       </p:sp>
       <p:sp>
         <p:nvSpPr>
@@ -2392,6 +2191,13 @@
           </a:solidFill>
           <a:ln/>
         </p:spPr>
+        <p:txBody>
+          <a:bodyPr/>
+          <a:lstStyle/>
+          <a:p>
+            <a:endParaRPr lang="zh-CN" altLang="en-US"/>
+          </a:p>
+        </p:txBody>
       </p:sp>
       <p:sp>
         <p:nvSpPr>
@@ -2414,6 +2220,13 @@
           </a:solidFill>
           <a:ln/>
         </p:spPr>
+        <p:txBody>
+          <a:bodyPr/>
+          <a:lstStyle/>
+          <a:p>
+            <a:endParaRPr lang="zh-CN" altLang="en-US"/>
+          </a:p>
+        </p:txBody>
       </p:sp>
       <p:sp>
         <p:nvSpPr>
@@ -2436,6 +2249,13 @@
           </a:solidFill>
           <a:ln/>
         </p:spPr>
+        <p:txBody>
+          <a:bodyPr/>
+          <a:lstStyle/>
+          <a:p>
+            <a:endParaRPr lang="zh-CN" altLang="en-US"/>
+          </a:p>
+        </p:txBody>
       </p:sp>
       <p:sp>
         <p:nvSpPr>
@@ -2458,6 +2278,13 @@
           </a:solidFill>
           <a:ln/>
         </p:spPr>
+        <p:txBody>
+          <a:bodyPr/>
+          <a:lstStyle/>
+          <a:p>
+            <a:endParaRPr lang="zh-CN" altLang="en-US"/>
+          </a:p>
+        </p:txBody>
       </p:sp>
       <p:sp>
         <p:nvSpPr>
@@ -2480,6 +2307,13 @@
           </a:solidFill>
           <a:ln/>
         </p:spPr>
+        <p:txBody>
+          <a:bodyPr/>
+          <a:lstStyle/>
+          <a:p>
+            <a:endParaRPr lang="zh-CN" altLang="en-US"/>
+          </a:p>
+        </p:txBody>
       </p:sp>
       <p:sp>
         <p:nvSpPr>
@@ -2502,6 +2336,13 @@
           </a:solidFill>
           <a:ln/>
         </p:spPr>
+        <p:txBody>
+          <a:bodyPr/>
+          <a:lstStyle/>
+          <a:p>
+            <a:endParaRPr lang="zh-CN" altLang="en-US"/>
+          </a:p>
+        </p:txBody>
       </p:sp>
       <p:sp>
         <p:nvSpPr>
@@ -2524,6 +2365,13 @@
           </a:solidFill>
           <a:ln/>
         </p:spPr>
+        <p:txBody>
+          <a:bodyPr/>
+          <a:lstStyle/>
+          <a:p>
+            <a:endParaRPr lang="zh-CN" altLang="en-US"/>
+          </a:p>
+        </p:txBody>
       </p:sp>
       <p:sp>
         <p:nvSpPr>
@@ -2546,6 +2394,13 @@
           </a:solidFill>
           <a:ln/>
         </p:spPr>
+        <p:txBody>
+          <a:bodyPr/>
+          <a:lstStyle/>
+          <a:p>
+            <a:endParaRPr lang="zh-CN" altLang="en-US"/>
+          </a:p>
+        </p:txBody>
       </p:sp>
       <p:sp>
         <p:nvSpPr>
@@ -2568,6 +2423,13 @@
           </a:solidFill>
           <a:ln/>
         </p:spPr>
+        <p:txBody>
+          <a:bodyPr/>
+          <a:lstStyle/>
+          <a:p>
+            <a:endParaRPr lang="zh-CN" altLang="en-US"/>
+          </a:p>
+        </p:txBody>
       </p:sp>
       <p:sp>
         <p:nvSpPr>
@@ -2590,6 +2452,13 @@
           </a:solidFill>
           <a:ln/>
         </p:spPr>
+        <p:txBody>
+          <a:bodyPr/>
+          <a:lstStyle/>
+          <a:p>
+            <a:endParaRPr lang="zh-CN" altLang="en-US"/>
+          </a:p>
+        </p:txBody>
       </p:sp>
       <p:sp>
         <p:nvSpPr>
@@ -2612,6 +2481,13 @@
           </a:solidFill>
           <a:ln/>
         </p:spPr>
+        <p:txBody>
+          <a:bodyPr/>
+          <a:lstStyle/>
+          <a:p>
+            <a:endParaRPr lang="zh-CN" altLang="en-US"/>
+          </a:p>
+        </p:txBody>
       </p:sp>
       <p:sp>
         <p:nvSpPr>
@@ -2634,6 +2510,13 @@
           </a:solidFill>
           <a:ln/>
         </p:spPr>
+        <p:txBody>
+          <a:bodyPr/>
+          <a:lstStyle/>
+          <a:p>
+            <a:endParaRPr lang="zh-CN" altLang="en-US"/>
+          </a:p>
+        </p:txBody>
       </p:sp>
       <p:sp>
         <p:nvSpPr>
@@ -2656,6 +2539,13 @@
           </a:solidFill>
           <a:ln/>
         </p:spPr>
+        <p:txBody>
+          <a:bodyPr/>
+          <a:lstStyle/>
+          <a:p>
+            <a:endParaRPr lang="zh-CN" altLang="en-US"/>
+          </a:p>
+        </p:txBody>
       </p:sp>
       <p:sp>
         <p:nvSpPr>
@@ -2678,6 +2568,13 @@
           </a:solidFill>
           <a:ln/>
         </p:spPr>
+        <p:txBody>
+          <a:bodyPr/>
+          <a:lstStyle/>
+          <a:p>
+            <a:endParaRPr lang="zh-CN" altLang="en-US"/>
+          </a:p>
+        </p:txBody>
       </p:sp>
       <p:sp>
         <p:nvSpPr>
@@ -2700,6 +2597,13 @@
           </a:solidFill>
           <a:ln/>
         </p:spPr>
+        <p:txBody>
+          <a:bodyPr/>
+          <a:lstStyle/>
+          <a:p>
+            <a:endParaRPr lang="zh-CN" altLang="en-US"/>
+          </a:p>
+        </p:txBody>
       </p:sp>
       <p:sp>
         <p:nvSpPr>
@@ -2722,6 +2626,13 @@
           </a:solidFill>
           <a:ln/>
         </p:spPr>
+        <p:txBody>
+          <a:bodyPr/>
+          <a:lstStyle/>
+          <a:p>
+            <a:endParaRPr lang="zh-CN" altLang="en-US"/>
+          </a:p>
+        </p:txBody>
       </p:sp>
       <p:sp>
         <p:nvSpPr>
@@ -2744,6 +2655,13 @@
           </a:solidFill>
           <a:ln/>
         </p:spPr>
+        <p:txBody>
+          <a:bodyPr/>
+          <a:lstStyle/>
+          <a:p>
+            <a:endParaRPr lang="zh-CN" altLang="en-US"/>
+          </a:p>
+        </p:txBody>
       </p:sp>
       <p:sp>
         <p:nvSpPr>
@@ -2766,6 +2684,13 @@
           </a:solidFill>
           <a:ln/>
         </p:spPr>
+        <p:txBody>
+          <a:bodyPr/>
+          <a:lstStyle/>
+          <a:p>
+            <a:endParaRPr lang="zh-CN" altLang="en-US"/>
+          </a:p>
+        </p:txBody>
       </p:sp>
       <p:sp>
         <p:nvSpPr>
@@ -2788,7 +2713,7 @@
           <a:bodyPr wrap="square" lIns="0" tIns="0" rIns="0" bIns="0" rtlCol="0" anchor="ctr"/>
           <a:lstStyle/>
           <a:p>
-            <a:pPr indent="0" marL="0">
+            <a:pPr marL="0" indent="0">
               <a:buNone/>
             </a:pPr>
             <a:r>
@@ -2827,7 +2752,7 @@
           <a:bodyPr wrap="square" lIns="0" tIns="0" rIns="0" bIns="0" rtlCol="0" anchor="ctr"/>
           <a:lstStyle/>
           <a:p>
-            <a:pPr indent="0" marL="0">
+            <a:pPr marL="0" indent="0">
               <a:buNone/>
             </a:pPr>
             <a:r>
@@ -2864,6 +2789,13 @@
           </a:solidFill>
           <a:ln/>
         </p:spPr>
+        <p:txBody>
+          <a:bodyPr/>
+          <a:lstStyle/>
+          <a:p>
+            <a:endParaRPr lang="zh-CN" altLang="en-US"/>
+          </a:p>
+        </p:txBody>
       </p:sp>
       <p:sp>
         <p:nvSpPr>
@@ -2886,11 +2818,11 @@
           <a:bodyPr wrap="square" lIns="0" tIns="0" rIns="0" bIns="0" rtlCol="0" anchor="ctr"/>
           <a:lstStyle/>
           <a:p>
-            <a:pPr indent="0" marL="0">
-              <a:buNone/>
-            </a:pPr>
-            <a:r>
-              <a:rPr lang="en-US" sz="1400" b="1" spc="200" kern="0" dirty="0">
+            <a:pPr marL="0" indent="0">
+              <a:buNone/>
+            </a:pPr>
+            <a:r>
+              <a:rPr lang="en-US" sz="1400" b="1" kern="0" spc="200" dirty="0">
                 <a:solidFill>
                   <a:srgbClr val="FFFFFF"/>
                 </a:solidFill>
@@ -2903,11 +2835,11 @@
             <a:endParaRPr lang="en-US" sz="1400" dirty="0"/>
           </a:p>
           <a:p>
-            <a:pPr indent="0" marL="0">
-              <a:buNone/>
-            </a:pPr>
-            <a:r>
-              <a:rPr lang="en-US" sz="1400" spc="200" kern="0" dirty="0">
+            <a:pPr marL="0" indent="0">
+              <a:buNone/>
+            </a:pPr>
+            <a:r>
+              <a:rPr lang="en-US" sz="1400" kern="0" spc="200" dirty="0">
                 <a:solidFill>
                   <a:srgbClr val="CADCFC"/>
                 </a:solidFill>
@@ -2915,7 +2847,7 @@
                 <a:ea typeface="Calibri" pitchFamily="34" charset="-122"/>
                 <a:cs typeface="Calibri" pitchFamily="34" charset="-120"/>
               </a:rPr>
-              <a:t>MSDS 6393 Deep Learning  ·  Spring 2026</a:t>
+              <a:t>Special Topics  ·  Spring 2026</a:t>
             </a:r>
             <a:endParaRPr lang="en-US" sz="1400" dirty="0"/>
           </a:p>
@@ -2937,6 +2869,7 @@
         <a:solidFill>
           <a:srgbClr val="FFFFFF"/>
         </a:solidFill>
+        <a:effectLst/>
       </p:bgPr>
     </p:bg>
     <p:spTree>
@@ -2974,7 +2907,7 @@
           <a:bodyPr wrap="square" lIns="0" tIns="0" rIns="0" bIns="0" rtlCol="0" anchor="ctr"/>
           <a:lstStyle/>
           <a:p>
-            <a:pPr indent="0" marL="0">
+            <a:pPr marL="0" indent="0">
               <a:buNone/>
             </a:pPr>
             <a:r>
@@ -3013,7 +2946,7 @@
           <a:bodyPr wrap="square" lIns="0" tIns="0" rIns="0" bIns="0" rtlCol="0" anchor="ctr"/>
           <a:lstStyle/>
           <a:p>
-            <a:pPr indent="0" marL="0">
+            <a:pPr marL="0" indent="0">
               <a:buNone/>
             </a:pPr>
             <a:r>
@@ -3033,15 +2966,15 @@
       </p:sp>
       <p:pic>
         <p:nvPicPr>
-          <p:cNvPr id="4" name="Image 0" descr="preencoded.png">    </p:cNvPr>
+          <p:cNvPr id="4" name="Image 0" descr="preencoded.png"/>
           <p:cNvPicPr>
             <a:picLocks noChangeAspect="1"/>
           </p:cNvPicPr>
           <p:nvPr/>
         </p:nvPicPr>
         <p:blipFill>
-          <a:blip r:embed="rId1"/>
-          <a:srcRect l="0" r="0" t="0" b="0"/>
+          <a:blip r:embed="rId3"/>
+          <a:srcRect/>
           <a:stretch/>
         </p:blipFill>
         <p:spPr>
@@ -3056,15 +2989,15 @@
       </p:pic>
       <p:pic>
         <p:nvPicPr>
-          <p:cNvPr id="5" name="Image 1" descr="preencoded.png">    </p:cNvPr>
+          <p:cNvPr id="5" name="Image 1" descr="preencoded.png"/>
           <p:cNvPicPr>
             <a:picLocks noChangeAspect="1"/>
           </p:cNvPicPr>
           <p:nvPr/>
         </p:nvPicPr>
         <p:blipFill>
-          <a:blip r:embed="rId2"/>
-          <a:srcRect l="0" r="0" t="0" b="0"/>
+          <a:blip r:embed="rId4"/>
+          <a:srcRect/>
           <a:stretch/>
         </p:blipFill>
         <p:spPr>
@@ -3098,7 +3031,7 @@
           <a:bodyPr wrap="square" lIns="0" tIns="0" rIns="0" bIns="0" rtlCol="0" anchor="ctr"/>
           <a:lstStyle/>
           <a:p>
-            <a:pPr algn="ctr" indent="0" marL="0">
+            <a:pPr marL="0" indent="0" algn="ctr">
               <a:buNone/>
             </a:pPr>
             <a:r>
@@ -3135,6 +3068,13 @@
           </a:solidFill>
           <a:ln/>
         </p:spPr>
+        <p:txBody>
+          <a:bodyPr/>
+          <a:lstStyle/>
+          <a:p>
+            <a:endParaRPr lang="zh-CN" altLang="en-US"/>
+          </a:p>
+        </p:txBody>
       </p:sp>
       <p:sp>
         <p:nvSpPr>
@@ -3157,11 +3097,11 @@
           <a:bodyPr wrap="square" lIns="0" tIns="0" rIns="0" bIns="0" rtlCol="0" anchor="ctr"/>
           <a:lstStyle/>
           <a:p>
-            <a:pPr indent="0" marL="0">
-              <a:buNone/>
-            </a:pPr>
-            <a:r>
-              <a:rPr lang="en-US" sz="1200" b="1" spc="200" kern="0" dirty="0">
+            <a:pPr marL="0" indent="0">
+              <a:buNone/>
+            </a:pPr>
+            <a:r>
+              <a:rPr lang="en-US" sz="1200" b="1" kern="0" spc="200" dirty="0">
                 <a:solidFill>
                   <a:srgbClr val="1E2761"/>
                 </a:solidFill>
@@ -3171,9 +3111,6 @@
               </a:rPr>
               <a:t>OBSERVATION  </a:t>
             </a:r>
-            <a:pPr indent="0" marL="0">
-              <a:buNone/>
-            </a:pPr>
             <a:r>
               <a:rPr lang="en-US" sz="1200" dirty="0">
                 <a:solidFill>
@@ -3205,6 +3142,7 @@
         <a:solidFill>
           <a:srgbClr val="FFFFFF"/>
         </a:solidFill>
+        <a:effectLst/>
       </p:bgPr>
     </p:bg>
     <p:spTree>
@@ -3242,7 +3180,7 @@
           <a:bodyPr wrap="square" lIns="0" tIns="0" rIns="0" bIns="0" rtlCol="0" anchor="ctr"/>
           <a:lstStyle/>
           <a:p>
-            <a:pPr indent="0" marL="0">
+            <a:pPr marL="0" indent="0">
               <a:buNone/>
             </a:pPr>
             <a:r>
@@ -3284,6 +3222,13 @@
             <a:prstDash val="solid"/>
           </a:ln>
         </p:spPr>
+        <p:txBody>
+          <a:bodyPr/>
+          <a:lstStyle/>
+          <a:p>
+            <a:endParaRPr lang="zh-CN" altLang="en-US"/>
+          </a:p>
+        </p:txBody>
       </p:sp>
       <p:sp>
         <p:nvSpPr>
@@ -3304,6 +3249,13 @@
           </a:solidFill>
           <a:ln/>
         </p:spPr>
+        <p:txBody>
+          <a:bodyPr/>
+          <a:lstStyle/>
+          <a:p>
+            <a:endParaRPr lang="zh-CN" altLang="en-US"/>
+          </a:p>
+        </p:txBody>
       </p:sp>
       <p:sp>
         <p:nvSpPr>
@@ -3326,7 +3278,7 @@
           <a:bodyPr wrap="square" lIns="0" tIns="0" rIns="0" bIns="0" rtlCol="0" anchor="ctr"/>
           <a:lstStyle/>
           <a:p>
-            <a:pPr algn="ctr" indent="0" marL="0">
+            <a:pPr marL="0" indent="0" algn="ctr">
               <a:buNone/>
             </a:pPr>
             <a:r>
@@ -3365,7 +3317,7 @@
           <a:bodyPr wrap="square" lIns="0" tIns="0" rIns="0" bIns="0" rtlCol="0" anchor="ctr"/>
           <a:lstStyle/>
           <a:p>
-            <a:pPr indent="0" marL="0">
+            <a:pPr marL="0" indent="0">
               <a:buNone/>
             </a:pPr>
             <a:r>
@@ -3404,7 +3356,7 @@
           <a:bodyPr wrap="square" lIns="0" tIns="0" rIns="0" bIns="0" rtlCol="0" anchor="ctr"/>
           <a:lstStyle/>
           <a:p>
-            <a:pPr indent="0" marL="0">
+            <a:pPr marL="0" indent="0">
               <a:buNone/>
             </a:pPr>
             <a:r>
@@ -3446,6 +3398,13 @@
             <a:prstDash val="solid"/>
           </a:ln>
         </p:spPr>
+        <p:txBody>
+          <a:bodyPr/>
+          <a:lstStyle/>
+          <a:p>
+            <a:endParaRPr lang="zh-CN" altLang="en-US"/>
+          </a:p>
+        </p:txBody>
       </p:sp>
       <p:sp>
         <p:nvSpPr>
@@ -3466,6 +3425,13 @@
           </a:solidFill>
           <a:ln/>
         </p:spPr>
+        <p:txBody>
+          <a:bodyPr/>
+          <a:lstStyle/>
+          <a:p>
+            <a:endParaRPr lang="zh-CN" altLang="en-US"/>
+          </a:p>
+        </p:txBody>
       </p:sp>
       <p:sp>
         <p:nvSpPr>
@@ -3488,7 +3454,7 @@
           <a:bodyPr wrap="square" lIns="0" tIns="0" rIns="0" bIns="0" rtlCol="0" anchor="ctr"/>
           <a:lstStyle/>
           <a:p>
-            <a:pPr algn="ctr" indent="0" marL="0">
+            <a:pPr marL="0" indent="0" algn="ctr">
               <a:buNone/>
             </a:pPr>
             <a:r>
@@ -3527,7 +3493,7 @@
           <a:bodyPr wrap="square" lIns="0" tIns="0" rIns="0" bIns="0" rtlCol="0" anchor="ctr"/>
           <a:lstStyle/>
           <a:p>
-            <a:pPr indent="0" marL="0">
+            <a:pPr marL="0" indent="0">
               <a:buNone/>
             </a:pPr>
             <a:r>
@@ -3566,7 +3532,7 @@
           <a:bodyPr wrap="square" lIns="0" tIns="0" rIns="0" bIns="0" rtlCol="0" anchor="ctr"/>
           <a:lstStyle/>
           <a:p>
-            <a:pPr indent="0" marL="0">
+            <a:pPr marL="0" indent="0">
               <a:buNone/>
             </a:pPr>
             <a:r>
@@ -3608,6 +3574,13 @@
             <a:prstDash val="solid"/>
           </a:ln>
         </p:spPr>
+        <p:txBody>
+          <a:bodyPr/>
+          <a:lstStyle/>
+          <a:p>
+            <a:endParaRPr lang="zh-CN" altLang="en-US"/>
+          </a:p>
+        </p:txBody>
       </p:sp>
       <p:sp>
         <p:nvSpPr>
@@ -3628,6 +3601,13 @@
           </a:solidFill>
           <a:ln/>
         </p:spPr>
+        <p:txBody>
+          <a:bodyPr/>
+          <a:lstStyle/>
+          <a:p>
+            <a:endParaRPr lang="zh-CN" altLang="en-US"/>
+          </a:p>
+        </p:txBody>
       </p:sp>
       <p:sp>
         <p:nvSpPr>
@@ -3650,7 +3630,7 @@
           <a:bodyPr wrap="square" lIns="0" tIns="0" rIns="0" bIns="0" rtlCol="0" anchor="ctr"/>
           <a:lstStyle/>
           <a:p>
-            <a:pPr algn="ctr" indent="0" marL="0">
+            <a:pPr marL="0" indent="0" algn="ctr">
               <a:buNone/>
             </a:pPr>
             <a:r>
@@ -3689,7 +3669,7 @@
           <a:bodyPr wrap="square" lIns="0" tIns="0" rIns="0" bIns="0" rtlCol="0" anchor="ctr"/>
           <a:lstStyle/>
           <a:p>
-            <a:pPr indent="0" marL="0">
+            <a:pPr marL="0" indent="0">
               <a:buNone/>
             </a:pPr>
             <a:r>
@@ -3728,7 +3708,7 @@
           <a:bodyPr wrap="square" lIns="0" tIns="0" rIns="0" bIns="0" rtlCol="0" anchor="ctr"/>
           <a:lstStyle/>
           <a:p>
-            <a:pPr indent="0" marL="0">
+            <a:pPr marL="0" indent="0">
               <a:buNone/>
             </a:pPr>
             <a:r>
@@ -3770,6 +3750,13 @@
             <a:prstDash val="solid"/>
           </a:ln>
         </p:spPr>
+        <p:txBody>
+          <a:bodyPr/>
+          <a:lstStyle/>
+          <a:p>
+            <a:endParaRPr lang="zh-CN" altLang="en-US"/>
+          </a:p>
+        </p:txBody>
       </p:sp>
       <p:sp>
         <p:nvSpPr>
@@ -3790,6 +3777,13 @@
           </a:solidFill>
           <a:ln/>
         </p:spPr>
+        <p:txBody>
+          <a:bodyPr/>
+          <a:lstStyle/>
+          <a:p>
+            <a:endParaRPr lang="zh-CN" altLang="en-US"/>
+          </a:p>
+        </p:txBody>
       </p:sp>
       <p:sp>
         <p:nvSpPr>
@@ -3812,7 +3806,7 @@
           <a:bodyPr wrap="square" lIns="0" tIns="0" rIns="0" bIns="0" rtlCol="0" anchor="ctr"/>
           <a:lstStyle/>
           <a:p>
-            <a:pPr algn="ctr" indent="0" marL="0">
+            <a:pPr marL="0" indent="0" algn="ctr">
               <a:buNone/>
             </a:pPr>
             <a:r>
@@ -3851,7 +3845,7 @@
           <a:bodyPr wrap="square" lIns="0" tIns="0" rIns="0" bIns="0" rtlCol="0" anchor="ctr"/>
           <a:lstStyle/>
           <a:p>
-            <a:pPr indent="0" marL="0">
+            <a:pPr marL="0" indent="0">
               <a:buNone/>
             </a:pPr>
             <a:r>
@@ -3890,7 +3884,7 @@
           <a:bodyPr wrap="square" lIns="0" tIns="0" rIns="0" bIns="0" rtlCol="0" anchor="ctr"/>
           <a:lstStyle/>
           <a:p>
-            <a:pPr indent="0" marL="0">
+            <a:pPr marL="0" indent="0">
               <a:buNone/>
             </a:pPr>
             <a:r>
@@ -3927,6 +3921,13 @@
           </a:solidFill>
           <a:ln/>
         </p:spPr>
+        <p:txBody>
+          <a:bodyPr/>
+          <a:lstStyle/>
+          <a:p>
+            <a:endParaRPr lang="zh-CN" altLang="en-US"/>
+          </a:p>
+        </p:txBody>
       </p:sp>
       <p:sp>
         <p:nvSpPr>
@@ -3949,7 +3950,7 @@
           <a:bodyPr wrap="square" lIns="0" tIns="0" rIns="0" bIns="0" rtlCol="0" anchor="ctr"/>
           <a:lstStyle/>
           <a:p>
-            <a:pPr algn="ctr" indent="0" marL="0">
+            <a:pPr marL="0" indent="0" algn="ctr">
               <a:buNone/>
             </a:pPr>
             <a:r>
@@ -3983,6 +3984,7 @@
         <a:solidFill>
           <a:srgbClr val="1E2761"/>
         </a:solidFill>
+        <a:effectLst/>
       </p:bgPr>
     </p:bg>
     <p:spTree>
@@ -4020,7 +4022,7 @@
           <a:bodyPr wrap="square" lIns="0" tIns="0" rIns="0" bIns="0" rtlCol="0" anchor="ctr"/>
           <a:lstStyle/>
           <a:p>
-            <a:pPr indent="0" marL="0">
+            <a:pPr marL="0" indent="0">
               <a:buNone/>
             </a:pPr>
             <a:r>
@@ -4057,6 +4059,13 @@
           </a:solidFill>
           <a:ln/>
         </p:spPr>
+        <p:txBody>
+          <a:bodyPr/>
+          <a:lstStyle/>
+          <a:p>
+            <a:endParaRPr lang="zh-CN" altLang="en-US"/>
+          </a:p>
+        </p:txBody>
       </p:sp>
       <p:sp>
         <p:nvSpPr>
@@ -4079,7 +4088,7 @@
           <a:bodyPr wrap="square" lIns="0" tIns="0" rIns="0" bIns="0" rtlCol="0" anchor="ctr"/>
           <a:lstStyle/>
           <a:p>
-            <a:pPr indent="0" marL="0">
+            <a:pPr marL="0" indent="0">
               <a:buNone/>
             </a:pPr>
             <a:r>
@@ -4118,7 +4127,7 @@
           <a:bodyPr wrap="square" lIns="0" tIns="0" rIns="0" bIns="0" rtlCol="0" anchor="ctr"/>
           <a:lstStyle/>
           <a:p>
-            <a:pPr indent="0" marL="0">
+            <a:pPr marL="0" indent="0">
               <a:buNone/>
             </a:pPr>
             <a:r>
@@ -4157,6 +4166,13 @@
           </a:solidFill>
           <a:ln/>
         </p:spPr>
+        <p:txBody>
+          <a:bodyPr/>
+          <a:lstStyle/>
+          <a:p>
+            <a:endParaRPr lang="zh-CN" altLang="en-US"/>
+          </a:p>
+        </p:txBody>
       </p:sp>
       <p:sp>
         <p:nvSpPr>
@@ -4179,11 +4195,11 @@
           <a:bodyPr wrap="square" lIns="0" tIns="0" rIns="0" bIns="0" rtlCol="0" anchor="ctr"/>
           <a:lstStyle/>
           <a:p>
-            <a:pPr indent="0" marL="0">
-              <a:buNone/>
-            </a:pPr>
-            <a:r>
-              <a:rPr lang="en-US" sz="1100" b="1" spc="300" kern="0" dirty="0">
+            <a:pPr marL="0" indent="0">
+              <a:buNone/>
+            </a:pPr>
+            <a:r>
+              <a:rPr lang="en-US" sz="1100" b="1" kern="0" spc="300" dirty="0">
                 <a:solidFill>
                   <a:srgbClr val="F96167"/>
                 </a:solidFill>
@@ -4218,7 +4234,7 @@
           <a:bodyPr wrap="square" lIns="0" tIns="0" rIns="0" bIns="0" rtlCol="0" anchor="ctr"/>
           <a:lstStyle/>
           <a:p>
-            <a:pPr indent="0" marL="0">
+            <a:pPr marL="0" indent="0">
               <a:spcAft>
                 <a:spcPts val="400"/>
               </a:spcAft>
@@ -4238,7 +4254,7 @@
             <a:endParaRPr lang="en-US" sz="1400" dirty="0"/>
           </a:p>
           <a:p>
-            <a:pPr indent="0" marL="0">
+            <a:pPr marL="0" indent="0">
               <a:spcAft>
                 <a:spcPts val="400"/>
               </a:spcAft>
@@ -4258,7 +4274,7 @@
             <a:endParaRPr lang="en-US" sz="1400" dirty="0"/>
           </a:p>
           <a:p>
-            <a:pPr indent="0" marL="0">
+            <a:pPr marL="0" indent="0">
               <a:spcAft>
                 <a:spcPts val="400"/>
               </a:spcAft>
@@ -4267,7 +4283,7 @@
             <a:endParaRPr lang="en-US" sz="1400" dirty="0"/>
           </a:p>
           <a:p>
-            <a:pPr indent="0" marL="0">
+            <a:pPr marL="0" indent="0">
               <a:spcAft>
                 <a:spcPts val="400"/>
               </a:spcAft>
@@ -4309,6 +4325,13 @@
           </a:solidFill>
           <a:ln/>
         </p:spPr>
+        <p:txBody>
+          <a:bodyPr/>
+          <a:lstStyle/>
+          <a:p>
+            <a:endParaRPr lang="zh-CN" altLang="en-US"/>
+          </a:p>
+        </p:txBody>
       </p:sp>
       <p:sp>
         <p:nvSpPr>
@@ -4331,11 +4354,11 @@
           <a:bodyPr wrap="square" lIns="0" tIns="0" rIns="0" bIns="0" rtlCol="0" anchor="ctr"/>
           <a:lstStyle/>
           <a:p>
-            <a:pPr indent="0" marL="0">
-              <a:buNone/>
-            </a:pPr>
-            <a:r>
-              <a:rPr lang="en-US" sz="1100" b="1" spc="300" kern="0" dirty="0">
+            <a:pPr marL="0" indent="0">
+              <a:buNone/>
+            </a:pPr>
+            <a:r>
+              <a:rPr lang="en-US" sz="1100" b="1" kern="0" spc="300" dirty="0">
                 <a:solidFill>
                   <a:srgbClr val="F96167"/>
                 </a:solidFill>
@@ -4370,7 +4393,7 @@
           <a:bodyPr wrap="square" lIns="0" tIns="0" rIns="0" bIns="0" rtlCol="0" anchor="ctr"/>
           <a:lstStyle/>
           <a:p>
-            <a:pPr indent="0" marL="0">
+            <a:pPr marL="0" indent="0">
               <a:spcAft>
                 <a:spcPts val="100"/>
               </a:spcAft>
@@ -4390,7 +4413,7 @@
             <a:endParaRPr lang="en-US" sz="1300" dirty="0"/>
           </a:p>
           <a:p>
-            <a:pPr indent="0" marL="0">
+            <a:pPr marL="0" indent="0">
               <a:spcAft>
                 <a:spcPts val="100"/>
               </a:spcAft>
@@ -4410,7 +4433,7 @@
             <a:endParaRPr lang="en-US" sz="1300" dirty="0"/>
           </a:p>
           <a:p>
-            <a:pPr indent="0" marL="0">
+            <a:pPr marL="0" indent="0">
               <a:spcAft>
                 <a:spcPts val="100"/>
               </a:spcAft>
@@ -4419,7 +4442,7 @@
             <a:endParaRPr lang="en-US" sz="1300" dirty="0"/>
           </a:p>
           <a:p>
-            <a:pPr indent="0" marL="0">
+            <a:pPr marL="0" indent="0">
               <a:spcAft>
                 <a:spcPts val="100"/>
               </a:spcAft>
@@ -4439,7 +4462,7 @@
             <a:endParaRPr lang="en-US" sz="1300" dirty="0"/>
           </a:p>
           <a:p>
-            <a:pPr indent="0" marL="0">
+            <a:pPr marL="0" indent="0">
               <a:spcAft>
                 <a:spcPts val="100"/>
               </a:spcAft>
@@ -4459,7 +4482,7 @@
             <a:endParaRPr lang="en-US" sz="1300" dirty="0"/>
           </a:p>
           <a:p>
-            <a:pPr indent="0" marL="0">
+            <a:pPr marL="0" indent="0">
               <a:spcAft>
                 <a:spcPts val="100"/>
               </a:spcAft>
@@ -4468,7 +4491,7 @@
             <a:endParaRPr lang="en-US" sz="1300" dirty="0"/>
           </a:p>
           <a:p>
-            <a:pPr indent="0" marL="0">
+            <a:pPr marL="0" indent="0">
               <a:spcAft>
                 <a:spcPts val="100"/>
               </a:spcAft>
@@ -4488,7 +4511,7 @@
             <a:endParaRPr lang="en-US" sz="1300" dirty="0"/>
           </a:p>
           <a:p>
-            <a:pPr indent="0" marL="0">
+            <a:pPr marL="0" indent="0">
               <a:spcAft>
                 <a:spcPts val="100"/>
               </a:spcAft>
@@ -4525,6 +4548,7 @@
         <a:solidFill>
           <a:srgbClr val="1E2761"/>
         </a:solidFill>
+        <a:effectLst/>
       </p:bgPr>
     </p:bg>
     <p:spTree>
@@ -4549,7 +4573,7 @@
         </p:nvSpPr>
         <p:spPr>
           <a:xfrm>
-            <a:off x="5486400" y="4023360"/>
+            <a:off x="5486400" y="3858768"/>
             <a:ext cx="1188720" cy="54864"/>
           </a:xfrm>
           <a:prstGeom prst="rect">
@@ -4560,6 +4584,13 @@
           </a:solidFill>
           <a:ln/>
         </p:spPr>
+        <p:txBody>
+          <a:bodyPr/>
+          <a:lstStyle/>
+          <a:p>
+            <a:endParaRPr lang="zh-CN" altLang="en-US"/>
+          </a:p>
+        </p:txBody>
       </p:sp>
       <p:sp>
         <p:nvSpPr>
@@ -4582,7 +4613,7 @@
           <a:bodyPr wrap="square" lIns="0" tIns="0" rIns="0" bIns="0" rtlCol="0" anchor="ctr"/>
           <a:lstStyle/>
           <a:p>
-            <a:pPr algn="ctr" indent="0" marL="0">
+            <a:pPr marL="0" indent="0" algn="ctr">
               <a:buNone/>
             </a:pPr>
             <a:r>
@@ -4597,45 +4628,6 @@
               <a:t>Thank you.</a:t>
             </a:r>
             <a:endParaRPr lang="en-US" sz="5600" dirty="0"/>
-          </a:p>
-        </p:txBody>
-      </p:sp>
-      <p:sp>
-        <p:nvSpPr>
-          <p:cNvPr id="4" name="Text 2"/>
-          <p:cNvSpPr/>
-          <p:nvPr/>
-        </p:nvSpPr>
-        <p:spPr>
-          <a:xfrm>
-            <a:off x="731520" y="3383280"/>
-            <a:ext cx="10698480" cy="548640"/>
-          </a:xfrm>
-          <a:prstGeom prst="rect">
-            <a:avLst/>
-          </a:prstGeom>
-          <a:noFill/>
-          <a:ln/>
-        </p:spPr>
-        <p:txBody>
-          <a:bodyPr wrap="square" lIns="0" tIns="0" rIns="0" bIns="0" rtlCol="0" anchor="ctr"/>
-          <a:lstStyle/>
-          <a:p>
-            <a:pPr algn="ctr" indent="0" marL="0">
-              <a:buNone/>
-            </a:pPr>
-            <a:r>
-              <a:rPr lang="en-US" sz="2400" i="1" dirty="0">
-                <a:solidFill>
-                  <a:srgbClr val="CADCFC"/>
-                </a:solidFill>
-                <a:latin typeface="Calibri" pitchFamily="34" charset="0"/>
-                <a:ea typeface="Calibri" pitchFamily="34" charset="-122"/>
-                <a:cs typeface="Calibri" pitchFamily="34" charset="-120"/>
-              </a:rPr>
-              <a:t>Questions?</a:t>
-            </a:r>
-            <a:endParaRPr lang="en-US" sz="2400" dirty="0"/>
           </a:p>
         </p:txBody>
       </p:sp>
@@ -4660,11 +4652,11 @@
           <a:bodyPr wrap="square" lIns="0" tIns="0" rIns="0" bIns="0" rtlCol="0" anchor="ctr"/>
           <a:lstStyle/>
           <a:p>
-            <a:pPr algn="ctr" indent="0" marL="0">
-              <a:buNone/>
-            </a:pPr>
-            <a:r>
-              <a:rPr lang="en-US" sz="1200" spc="300" kern="0" dirty="0">
+            <a:pPr marL="0" indent="0" algn="ctr">
+              <a:buNone/>
+            </a:pPr>
+            <a:r>
+              <a:rPr lang="en-US" sz="1200" kern="0" spc="300" dirty="0">
                 <a:solidFill>
                   <a:srgbClr val="CADCFC"/>
                 </a:solidFill>
@@ -4672,7 +4664,7 @@
                 <a:ea typeface="Calibri" pitchFamily="34" charset="-122"/>
                 <a:cs typeface="Calibri" pitchFamily="34" charset="-120"/>
               </a:rPr>
-              <a:t>Xiaoyang Su   ·   MSDS 6393 Deep Learning   ·   Spring 2026</a:t>
+              <a:t>Xiaoyang Su   ·   Special Topics   ·   University of St. Thomas   ·   Spring 2026</a:t>
             </a:r>
             <a:endParaRPr lang="en-US" sz="1200" dirty="0"/>
           </a:p>
@@ -4694,6 +4686,7 @@
         <a:solidFill>
           <a:srgbClr val="FFFFFF"/>
         </a:solidFill>
+        <a:effectLst/>
       </p:bgPr>
     </p:bg>
     <p:spTree>
@@ -4731,7 +4724,7 @@
           <a:bodyPr wrap="square" lIns="0" tIns="0" rIns="0" bIns="0" rtlCol="0" anchor="ctr"/>
           <a:lstStyle/>
           <a:p>
-            <a:pPr indent="0" marL="0">
+            <a:pPr marL="0" indent="0">
               <a:buNone/>
             </a:pPr>
             <a:r>
@@ -4770,7 +4763,7 @@
           <a:bodyPr wrap="square" lIns="0" tIns="0" rIns="0" bIns="0" rtlCol="0" anchor="ctr"/>
           <a:lstStyle/>
           <a:p>
-            <a:pPr indent="0" marL="0">
+            <a:pPr marL="0" indent="0">
               <a:spcAft>
                 <a:spcPts val="600"/>
               </a:spcAft>
@@ -4787,53 +4780,81 @@
               </a:rPr>
               <a:t>Breast cancer </a:t>
             </a:r>
-            <a:pPr indent="0" marL="0">
+            <a:r>
+              <a:rPr lang="en-US" sz="1800" dirty="0">
+                <a:solidFill>
+                  <a:srgbClr val="0F172A"/>
+                </a:solidFill>
+                <a:latin typeface="Calibri" pitchFamily="34" charset="0"/>
+                <a:ea typeface="Calibri" pitchFamily="34" charset="-122"/>
+                <a:cs typeface="Calibri" pitchFamily="34" charset="-120"/>
+              </a:rPr>
+              <a:t>is one of the most common cancers worldwide.</a:t>
+            </a:r>
+            <a:endParaRPr lang="en-US" sz="1800" dirty="0"/>
+          </a:p>
+          <a:p>
+            <a:pPr marL="0" indent="0">
               <a:spcAft>
                 <a:spcPts val="600"/>
               </a:spcAft>
               <a:buNone/>
             </a:pPr>
-            <a:r>
-              <a:rPr lang="en-US" sz="1800" dirty="0">
-                <a:solidFill>
-                  <a:srgbClr val="0F172A"/>
-                </a:solidFill>
-                <a:latin typeface="Calibri" pitchFamily="34" charset="0"/>
-                <a:ea typeface="Calibri" pitchFamily="34" charset="-122"/>
-                <a:cs typeface="Calibri" pitchFamily="34" charset="-120"/>
-              </a:rPr>
-              <a:t>is one of the most common cancers worldwide.</a:t>
-            </a:r>
             <a:endParaRPr lang="en-US" sz="1800" dirty="0"/>
           </a:p>
           <a:p>
-            <a:pPr indent="0" marL="0">
+            <a:pPr marL="0" indent="0">
               <a:spcAft>
                 <a:spcPts val="600"/>
               </a:spcAft>
               <a:buNone/>
             </a:pPr>
+            <a:r>
+              <a:rPr lang="en-US" sz="1800" dirty="0">
+                <a:solidFill>
+                  <a:srgbClr val="0F172A"/>
+                </a:solidFill>
+                <a:latin typeface="Calibri" pitchFamily="34" charset="0"/>
+                <a:ea typeface="Calibri" pitchFamily="34" charset="-122"/>
+                <a:cs typeface="Calibri" pitchFamily="34" charset="-120"/>
+              </a:rPr>
+              <a:t>Ultrasound is a key screening tool — but identifying tumor boundaries by hand is </a:t>
+            </a:r>
+            <a:r>
+              <a:rPr lang="en-US" sz="1800" b="1" dirty="0">
+                <a:solidFill>
+                  <a:srgbClr val="F96167"/>
+                </a:solidFill>
+                <a:latin typeface="Calibri" pitchFamily="34" charset="0"/>
+                <a:ea typeface="Calibri" pitchFamily="34" charset="-122"/>
+                <a:cs typeface="Calibri" pitchFamily="34" charset="-120"/>
+              </a:rPr>
+              <a:t>slow and subjective</a:t>
+            </a:r>
+            <a:r>
+              <a:rPr lang="en-US" sz="1800" dirty="0">
+                <a:solidFill>
+                  <a:srgbClr val="0F172A"/>
+                </a:solidFill>
+                <a:latin typeface="Calibri" pitchFamily="34" charset="0"/>
+                <a:ea typeface="Calibri" pitchFamily="34" charset="-122"/>
+                <a:cs typeface="Calibri" pitchFamily="34" charset="-120"/>
+              </a:rPr>
+              <a:t>.</a:t>
+            </a:r>
             <a:endParaRPr lang="en-US" sz="1800" dirty="0"/>
           </a:p>
           <a:p>
-            <a:pPr indent="0" marL="0">
+            <a:pPr marL="0" indent="0">
               <a:spcAft>
                 <a:spcPts val="600"/>
               </a:spcAft>
               <a:buNone/>
             </a:pPr>
-            <a:r>
-              <a:rPr lang="en-US" sz="1800" dirty="0">
-                <a:solidFill>
-                  <a:srgbClr val="0F172A"/>
-                </a:solidFill>
-                <a:latin typeface="Calibri" pitchFamily="34" charset="0"/>
-                <a:ea typeface="Calibri" pitchFamily="34" charset="-122"/>
-                <a:cs typeface="Calibri" pitchFamily="34" charset="-120"/>
-              </a:rPr>
-              <a:t>Ultrasound is a key screening tool — but identifying tumor boundaries by hand is </a:t>
-            </a:r>
-            <a:pPr indent="0" marL="0">
+            <a:endParaRPr lang="en-US" sz="1800" dirty="0"/>
+          </a:p>
+          <a:p>
+            <a:pPr marL="0" indent="0">
               <a:spcAft>
                 <a:spcPts val="600"/>
               </a:spcAft>
@@ -4842,22 +4863,190 @@
             <a:r>
               <a:rPr lang="en-US" sz="1800" b="1" dirty="0">
                 <a:solidFill>
+                  <a:srgbClr val="0F172A"/>
+                </a:solidFill>
+                <a:latin typeface="Calibri" pitchFamily="34" charset="0"/>
+                <a:ea typeface="Calibri" pitchFamily="34" charset="-122"/>
+                <a:cs typeface="Calibri" pitchFamily="34" charset="-120"/>
+              </a:rPr>
+              <a:t>Goal: </a:t>
+            </a:r>
+            <a:r>
+              <a:rPr lang="en-US" sz="1800" dirty="0">
+                <a:solidFill>
+                  <a:srgbClr val="0F172A"/>
+                </a:solidFill>
+                <a:latin typeface="Calibri" pitchFamily="34" charset="0"/>
+                <a:ea typeface="Calibri" pitchFamily="34" charset="-122"/>
+                <a:cs typeface="Calibri" pitchFamily="34" charset="-120"/>
+              </a:rPr>
+              <a:t>Train a CNN to automatically segment tumor regions, supporting faster and more consistent diagnosis.</a:t>
+            </a:r>
+            <a:endParaRPr lang="en-US" sz="1800" dirty="0"/>
+          </a:p>
+        </p:txBody>
+      </p:sp>
+      <p:sp>
+        <p:nvSpPr>
+          <p:cNvPr id="4" name="Shape 2"/>
+          <p:cNvSpPr/>
+          <p:nvPr/>
+        </p:nvSpPr>
+        <p:spPr>
+          <a:xfrm>
+            <a:off x="6949440" y="1463040"/>
+            <a:ext cx="4572000" cy="3657600"/>
+          </a:xfrm>
+          <a:prstGeom prst="rect">
+            <a:avLst/>
+          </a:prstGeom>
+          <a:solidFill>
+            <a:srgbClr val="F1F5F9"/>
+          </a:solidFill>
+          <a:ln/>
+        </p:spPr>
+        <p:txBody>
+          <a:bodyPr/>
+          <a:lstStyle/>
+          <a:p>
+            <a:endParaRPr lang="zh-CN" altLang="en-US"/>
+          </a:p>
+        </p:txBody>
+      </p:sp>
+      <p:sp>
+        <p:nvSpPr>
+          <p:cNvPr id="5" name="Shape 3"/>
+          <p:cNvSpPr/>
+          <p:nvPr/>
+        </p:nvSpPr>
+        <p:spPr>
+          <a:xfrm>
+            <a:off x="6949440" y="1463040"/>
+            <a:ext cx="73152" cy="3657600"/>
+          </a:xfrm>
+          <a:prstGeom prst="rect">
+            <a:avLst/>
+          </a:prstGeom>
+          <a:solidFill>
+            <a:srgbClr val="F96167"/>
+          </a:solidFill>
+          <a:ln/>
+        </p:spPr>
+        <p:txBody>
+          <a:bodyPr/>
+          <a:lstStyle/>
+          <a:p>
+            <a:endParaRPr lang="zh-CN" altLang="en-US"/>
+          </a:p>
+        </p:txBody>
+      </p:sp>
+      <p:sp>
+        <p:nvSpPr>
+          <p:cNvPr id="6" name="Text 4"/>
+          <p:cNvSpPr/>
+          <p:nvPr/>
+        </p:nvSpPr>
+        <p:spPr>
+          <a:xfrm>
+            <a:off x="7223760" y="1691640"/>
+            <a:ext cx="4114800" cy="365760"/>
+          </a:xfrm>
+          <a:prstGeom prst="rect">
+            <a:avLst/>
+          </a:prstGeom>
+          <a:noFill/>
+          <a:ln/>
+        </p:spPr>
+        <p:txBody>
+          <a:bodyPr wrap="square" lIns="0" tIns="0" rIns="0" bIns="0" rtlCol="0" anchor="ctr"/>
+          <a:lstStyle/>
+          <a:p>
+            <a:pPr marL="0" indent="0">
+              <a:buNone/>
+            </a:pPr>
+            <a:r>
+              <a:rPr lang="en-US" sz="1200" b="1" kern="0" spc="300" dirty="0">
+                <a:solidFill>
                   <a:srgbClr val="F96167"/>
                 </a:solidFill>
                 <a:latin typeface="Calibri" pitchFamily="34" charset="0"/>
                 <a:ea typeface="Calibri" pitchFamily="34" charset="-122"/>
                 <a:cs typeface="Calibri" pitchFamily="34" charset="-120"/>
               </a:rPr>
-              <a:t>slow and subjective</a:t>
-            </a:r>
-            <a:pPr indent="0" marL="0">
+              <a:t>THE CHALLENGE</a:t>
+            </a:r>
+            <a:endParaRPr lang="en-US" sz="1200" dirty="0"/>
+          </a:p>
+        </p:txBody>
+      </p:sp>
+      <p:sp>
+        <p:nvSpPr>
+          <p:cNvPr id="7" name="Text 5"/>
+          <p:cNvSpPr/>
+          <p:nvPr/>
+        </p:nvSpPr>
+        <p:spPr>
+          <a:xfrm>
+            <a:off x="7223760" y="2103120"/>
+            <a:ext cx="4114800" cy="457200"/>
+          </a:xfrm>
+          <a:prstGeom prst="rect">
+            <a:avLst/>
+          </a:prstGeom>
+          <a:noFill/>
+          <a:ln/>
+        </p:spPr>
+        <p:txBody>
+          <a:bodyPr wrap="square" lIns="0" tIns="0" rIns="0" bIns="0" rtlCol="0" anchor="ctr"/>
+          <a:lstStyle/>
+          <a:p>
+            <a:pPr marL="0" indent="0">
+              <a:buNone/>
+            </a:pPr>
+            <a:r>
+              <a:rPr lang="en-US" sz="2200" b="1" dirty="0">
+                <a:solidFill>
+                  <a:srgbClr val="1E2761"/>
+                </a:solidFill>
+                <a:latin typeface="Calibri" pitchFamily="34" charset="0"/>
+                <a:ea typeface="Calibri" pitchFamily="34" charset="-122"/>
+                <a:cs typeface="Calibri" pitchFamily="34" charset="-120"/>
+              </a:rPr>
+              <a:t>Medical datasets are small.</a:t>
+            </a:r>
+            <a:endParaRPr lang="en-US" sz="2200" dirty="0"/>
+          </a:p>
+        </p:txBody>
+      </p:sp>
+      <p:sp>
+        <p:nvSpPr>
+          <p:cNvPr id="8" name="Text 6"/>
+          <p:cNvSpPr/>
+          <p:nvPr/>
+        </p:nvSpPr>
+        <p:spPr>
+          <a:xfrm>
+            <a:off x="7223760" y="2697480"/>
+            <a:ext cx="4114800" cy="2286000"/>
+          </a:xfrm>
+          <a:prstGeom prst="rect">
+            <a:avLst/>
+          </a:prstGeom>
+          <a:noFill/>
+          <a:ln/>
+        </p:spPr>
+        <p:txBody>
+          <a:bodyPr wrap="square" lIns="0" tIns="0" rIns="0" bIns="0" rtlCol="0" anchor="ctr"/>
+          <a:lstStyle/>
+          <a:p>
+            <a:pPr marL="0" indent="0">
               <a:spcAft>
                 <a:spcPts val="600"/>
               </a:spcAft>
               <a:buNone/>
             </a:pPr>
             <a:r>
-              <a:rPr lang="en-US" sz="1800" dirty="0">
+              <a:rPr lang="en-US" sz="1400" dirty="0">
                 <a:solidFill>
                   <a:srgbClr val="0F172A"/>
                 </a:solidFill>
@@ -4865,227 +5054,21 @@
                 <a:ea typeface="Calibri" pitchFamily="34" charset="-122"/>
                 <a:cs typeface="Calibri" pitchFamily="34" charset="-120"/>
               </a:rPr>
-              <a:t>.</a:t>
-            </a:r>
-            <a:endParaRPr lang="en-US" sz="1800" dirty="0"/>
-          </a:p>
-          <a:p>
-            <a:pPr indent="0" marL="0">
+              <a:t>Expert annotation is expensive.</a:t>
+            </a:r>
+            <a:endParaRPr lang="en-US" sz="1400" dirty="0"/>
+          </a:p>
+          <a:p>
+            <a:pPr marL="0" indent="0">
               <a:spcAft>
                 <a:spcPts val="600"/>
               </a:spcAft>
               <a:buNone/>
             </a:pPr>
-            <a:endParaRPr lang="en-US" sz="1800" dirty="0"/>
-          </a:p>
-          <a:p>
-            <a:pPr indent="0" marL="0">
-              <a:spcAft>
-                <a:spcPts val="600"/>
-              </a:spcAft>
-              <a:buNone/>
-            </a:pPr>
-            <a:r>
-              <a:rPr lang="en-US" sz="1800" b="1" dirty="0">
-                <a:solidFill>
-                  <a:srgbClr val="0F172A"/>
-                </a:solidFill>
-                <a:latin typeface="Calibri" pitchFamily="34" charset="0"/>
-                <a:ea typeface="Calibri" pitchFamily="34" charset="-122"/>
-                <a:cs typeface="Calibri" pitchFamily="34" charset="-120"/>
-              </a:rPr>
-              <a:t>Goal: </a:t>
-            </a:r>
-            <a:pPr indent="0" marL="0">
-              <a:spcAft>
-                <a:spcPts val="600"/>
-              </a:spcAft>
-              <a:buNone/>
-            </a:pPr>
-            <a:r>
-              <a:rPr lang="en-US" sz="1800" dirty="0">
-                <a:solidFill>
-                  <a:srgbClr val="0F172A"/>
-                </a:solidFill>
-                <a:latin typeface="Calibri" pitchFamily="34" charset="0"/>
-                <a:ea typeface="Calibri" pitchFamily="34" charset="-122"/>
-                <a:cs typeface="Calibri" pitchFamily="34" charset="-120"/>
-              </a:rPr>
-              <a:t>Train a CNN to automatically segment tumor regions, supporting faster and more consistent diagnosis.</a:t>
-            </a:r>
-            <a:endParaRPr lang="en-US" sz="1800" dirty="0"/>
-          </a:p>
-        </p:txBody>
-      </p:sp>
-      <p:sp>
-        <p:nvSpPr>
-          <p:cNvPr id="4" name="Shape 2"/>
-          <p:cNvSpPr/>
-          <p:nvPr/>
-        </p:nvSpPr>
-        <p:spPr>
-          <a:xfrm>
-            <a:off x="6949440" y="1463040"/>
-            <a:ext cx="4572000" cy="3657600"/>
-          </a:xfrm>
-          <a:prstGeom prst="rect">
-            <a:avLst/>
-          </a:prstGeom>
-          <a:solidFill>
-            <a:srgbClr val="F1F5F9"/>
-          </a:solidFill>
-          <a:ln/>
-        </p:spPr>
-      </p:sp>
-      <p:sp>
-        <p:nvSpPr>
-          <p:cNvPr id="5" name="Shape 3"/>
-          <p:cNvSpPr/>
-          <p:nvPr/>
-        </p:nvSpPr>
-        <p:spPr>
-          <a:xfrm>
-            <a:off x="6949440" y="1463040"/>
-            <a:ext cx="73152" cy="3657600"/>
-          </a:xfrm>
-          <a:prstGeom prst="rect">
-            <a:avLst/>
-          </a:prstGeom>
-          <a:solidFill>
-            <a:srgbClr val="F96167"/>
-          </a:solidFill>
-          <a:ln/>
-        </p:spPr>
-      </p:sp>
-      <p:sp>
-        <p:nvSpPr>
-          <p:cNvPr id="6" name="Text 4"/>
-          <p:cNvSpPr/>
-          <p:nvPr/>
-        </p:nvSpPr>
-        <p:spPr>
-          <a:xfrm>
-            <a:off x="7223760" y="1691640"/>
-            <a:ext cx="4114800" cy="365760"/>
-          </a:xfrm>
-          <a:prstGeom prst="rect">
-            <a:avLst/>
-          </a:prstGeom>
-          <a:noFill/>
-          <a:ln/>
-        </p:spPr>
-        <p:txBody>
-          <a:bodyPr wrap="square" lIns="0" tIns="0" rIns="0" bIns="0" rtlCol="0" anchor="ctr"/>
-          <a:lstStyle/>
-          <a:p>
-            <a:pPr indent="0" marL="0">
-              <a:buNone/>
-            </a:pPr>
-            <a:r>
-              <a:rPr lang="en-US" sz="1200" b="1" spc="300" kern="0" dirty="0">
-                <a:solidFill>
-                  <a:srgbClr val="F96167"/>
-                </a:solidFill>
-                <a:latin typeface="Calibri" pitchFamily="34" charset="0"/>
-                <a:ea typeface="Calibri" pitchFamily="34" charset="-122"/>
-                <a:cs typeface="Calibri" pitchFamily="34" charset="-120"/>
-              </a:rPr>
-              <a:t>THE CHALLENGE</a:t>
-            </a:r>
-            <a:endParaRPr lang="en-US" sz="1200" dirty="0"/>
-          </a:p>
-        </p:txBody>
-      </p:sp>
-      <p:sp>
-        <p:nvSpPr>
-          <p:cNvPr id="7" name="Text 5"/>
-          <p:cNvSpPr/>
-          <p:nvPr/>
-        </p:nvSpPr>
-        <p:spPr>
-          <a:xfrm>
-            <a:off x="7223760" y="2103120"/>
-            <a:ext cx="4114800" cy="457200"/>
-          </a:xfrm>
-          <a:prstGeom prst="rect">
-            <a:avLst/>
-          </a:prstGeom>
-          <a:noFill/>
-          <a:ln/>
-        </p:spPr>
-        <p:txBody>
-          <a:bodyPr wrap="square" lIns="0" tIns="0" rIns="0" bIns="0" rtlCol="0" anchor="ctr"/>
-          <a:lstStyle/>
-          <a:p>
-            <a:pPr indent="0" marL="0">
-              <a:buNone/>
-            </a:pPr>
-            <a:r>
-              <a:rPr lang="en-US" sz="2200" b="1" dirty="0">
-                <a:solidFill>
-                  <a:srgbClr val="1E2761"/>
-                </a:solidFill>
-                <a:latin typeface="Calibri" pitchFamily="34" charset="0"/>
-                <a:ea typeface="Calibri" pitchFamily="34" charset="-122"/>
-                <a:cs typeface="Calibri" pitchFamily="34" charset="-120"/>
-              </a:rPr>
-              <a:t>Medical datasets are small.</a:t>
-            </a:r>
-            <a:endParaRPr lang="en-US" sz="2200" dirty="0"/>
-          </a:p>
-        </p:txBody>
-      </p:sp>
-      <p:sp>
-        <p:nvSpPr>
-          <p:cNvPr id="8" name="Text 6"/>
-          <p:cNvSpPr/>
-          <p:nvPr/>
-        </p:nvSpPr>
-        <p:spPr>
-          <a:xfrm>
-            <a:off x="7223760" y="2697480"/>
-            <a:ext cx="4114800" cy="2286000"/>
-          </a:xfrm>
-          <a:prstGeom prst="rect">
-            <a:avLst/>
-          </a:prstGeom>
-          <a:noFill/>
-          <a:ln/>
-        </p:spPr>
-        <p:txBody>
-          <a:bodyPr wrap="square" lIns="0" tIns="0" rIns="0" bIns="0" rtlCol="0" anchor="ctr"/>
-          <a:lstStyle/>
-          <a:p>
-            <a:pPr indent="0" marL="0">
-              <a:spcAft>
-                <a:spcPts val="600"/>
-              </a:spcAft>
-              <a:buNone/>
-            </a:pPr>
-            <a:r>
-              <a:rPr lang="en-US" sz="1400" dirty="0">
-                <a:solidFill>
-                  <a:srgbClr val="0F172A"/>
-                </a:solidFill>
-                <a:latin typeface="Calibri" pitchFamily="34" charset="0"/>
-                <a:ea typeface="Calibri" pitchFamily="34" charset="-122"/>
-                <a:cs typeface="Calibri" pitchFamily="34" charset="-120"/>
-              </a:rPr>
-              <a:t>Expert annotation is expensive.</a:t>
-            </a:r>
             <a:endParaRPr lang="en-US" sz="1400" dirty="0"/>
           </a:p>
           <a:p>
-            <a:pPr indent="0" marL="0">
-              <a:spcAft>
-                <a:spcPts val="600"/>
-              </a:spcAft>
-              <a:buNone/>
-            </a:pPr>
-            <a:endParaRPr lang="en-US" sz="1400" dirty="0"/>
-          </a:p>
-          <a:p>
-            <a:pPr indent="0" marL="0">
+            <a:pPr marL="0" indent="0">
               <a:spcAft>
                 <a:spcPts val="600"/>
               </a:spcAft>
@@ -5122,6 +5105,7 @@
         <a:solidFill>
           <a:srgbClr val="FFFFFF"/>
         </a:solidFill>
+        <a:effectLst/>
       </p:bgPr>
     </p:bg>
     <p:spTree>
@@ -5159,7 +5143,7 @@
           <a:bodyPr wrap="square" lIns="0" tIns="0" rIns="0" bIns="0" rtlCol="0" anchor="ctr"/>
           <a:lstStyle/>
           <a:p>
-            <a:pPr indent="0" marL="0">
+            <a:pPr marL="0" indent="0">
               <a:buNone/>
             </a:pPr>
             <a:r>
@@ -5201,6 +5185,13 @@
             <a:prstDash val="solid"/>
           </a:ln>
         </p:spPr>
+        <p:txBody>
+          <a:bodyPr/>
+          <a:lstStyle/>
+          <a:p>
+            <a:endParaRPr lang="zh-CN" altLang="en-US"/>
+          </a:p>
+        </p:txBody>
       </p:sp>
       <p:sp>
         <p:nvSpPr>
@@ -5223,11 +5214,11 @@
           <a:bodyPr wrap="square" lIns="0" tIns="0" rIns="0" bIns="0" rtlCol="0" anchor="ctr"/>
           <a:lstStyle/>
           <a:p>
-            <a:pPr algn="ctr" indent="0" marL="0">
-              <a:buNone/>
-            </a:pPr>
-            <a:r>
-              <a:rPr lang="en-US" sz="1100" b="1" spc="300" kern="0" dirty="0">
+            <a:pPr marL="0" indent="0" algn="ctr">
+              <a:buNone/>
+            </a:pPr>
+            <a:r>
+              <a:rPr lang="en-US" sz="1100" b="1" kern="0" spc="300" dirty="0">
                 <a:solidFill>
                   <a:srgbClr val="3B82F6"/>
                 </a:solidFill>
@@ -5262,7 +5253,7 @@
           <a:bodyPr wrap="square" lIns="0" tIns="0" rIns="0" bIns="0" rtlCol="0" anchor="ctr"/>
           <a:lstStyle/>
           <a:p>
-            <a:pPr algn="ctr" indent="0" marL="0">
+            <a:pPr marL="0" indent="0" algn="ctr">
               <a:buNone/>
             </a:pPr>
             <a:r>
@@ -5301,7 +5292,7 @@
           <a:bodyPr wrap="square" lIns="0" tIns="0" rIns="0" bIns="0" rtlCol="0" anchor="ctr"/>
           <a:lstStyle/>
           <a:p>
-            <a:pPr algn="ctr" indent="0" marL="0">
+            <a:pPr marL="0" indent="0" algn="ctr">
               <a:buNone/>
             </a:pPr>
             <a:r>
@@ -5340,7 +5331,7 @@
           <a:bodyPr wrap="square" lIns="0" tIns="0" rIns="0" bIns="0" rtlCol="0" anchor="ctr"/>
           <a:lstStyle/>
           <a:p>
-            <a:pPr algn="ctr" indent="0" marL="0">
+            <a:pPr marL="0" indent="0" algn="ctr">
               <a:buNone/>
             </a:pPr>
             <a:r>
@@ -5377,6 +5368,13 @@
           </a:solidFill>
           <a:ln/>
         </p:spPr>
+        <p:txBody>
+          <a:bodyPr/>
+          <a:lstStyle/>
+          <a:p>
+            <a:endParaRPr lang="zh-CN" altLang="en-US"/>
+          </a:p>
+        </p:txBody>
       </p:sp>
       <p:sp>
         <p:nvSpPr>
@@ -5399,11 +5397,11 @@
           <a:bodyPr wrap="square" lIns="0" tIns="0" rIns="0" bIns="0" rtlCol="0" anchor="ctr"/>
           <a:lstStyle/>
           <a:p>
-            <a:pPr algn="ctr" indent="0" marL="0">
-              <a:buNone/>
-            </a:pPr>
-            <a:r>
-              <a:rPr lang="en-US" sz="1100" b="1" spc="300" kern="0" dirty="0">
+            <a:pPr marL="0" indent="0" algn="ctr">
+              <a:buNone/>
+            </a:pPr>
+            <a:r>
+              <a:rPr lang="en-US" sz="1100" b="1" kern="0" spc="300" dirty="0">
                 <a:solidFill>
                   <a:srgbClr val="CADCFC"/>
                 </a:solidFill>
@@ -5438,7 +5436,7 @@
           <a:bodyPr wrap="square" lIns="0" tIns="0" rIns="0" bIns="0" rtlCol="0" anchor="ctr"/>
           <a:lstStyle/>
           <a:p>
-            <a:pPr algn="ctr" indent="0" marL="0">
+            <a:pPr marL="0" indent="0" algn="ctr">
               <a:buNone/>
             </a:pPr>
             <a:r>
@@ -5477,7 +5475,7 @@
           <a:bodyPr wrap="square" lIns="0" tIns="0" rIns="0" bIns="0" rtlCol="0" anchor="ctr"/>
           <a:lstStyle/>
           <a:p>
-            <a:pPr algn="ctr" indent="0" marL="0">
+            <a:pPr marL="0" indent="0" algn="ctr">
               <a:buNone/>
             </a:pPr>
             <a:r>
@@ -5516,7 +5514,7 @@
           <a:bodyPr wrap="square" lIns="0" tIns="0" rIns="0" bIns="0" rtlCol="0" anchor="ctr"/>
           <a:lstStyle/>
           <a:p>
-            <a:pPr algn="ctr" indent="0" marL="0">
+            <a:pPr marL="0" indent="0" algn="ctr">
               <a:buNone/>
             </a:pPr>
             <a:r>
@@ -5558,6 +5556,13 @@
             <a:prstDash val="solid"/>
           </a:ln>
         </p:spPr>
+        <p:txBody>
+          <a:bodyPr/>
+          <a:lstStyle/>
+          <a:p>
+            <a:endParaRPr lang="zh-CN" altLang="en-US"/>
+          </a:p>
+        </p:txBody>
       </p:sp>
       <p:sp>
         <p:nvSpPr>
@@ -5580,11 +5585,11 @@
           <a:bodyPr wrap="square" lIns="0" tIns="0" rIns="0" bIns="0" rtlCol="0" anchor="ctr"/>
           <a:lstStyle/>
           <a:p>
-            <a:pPr algn="ctr" indent="0" marL="0">
-              <a:buNone/>
-            </a:pPr>
-            <a:r>
-              <a:rPr lang="en-US" sz="1100" b="1" spc="300" kern="0" dirty="0">
+            <a:pPr marL="0" indent="0" algn="ctr">
+              <a:buNone/>
+            </a:pPr>
+            <a:r>
+              <a:rPr lang="en-US" sz="1100" b="1" kern="0" spc="300" dirty="0">
                 <a:solidFill>
                   <a:srgbClr val="10B981"/>
                 </a:solidFill>
@@ -5619,7 +5624,7 @@
           <a:bodyPr wrap="square" lIns="0" tIns="0" rIns="0" bIns="0" rtlCol="0" anchor="ctr"/>
           <a:lstStyle/>
           <a:p>
-            <a:pPr algn="ctr" indent="0" marL="0">
+            <a:pPr marL="0" indent="0" algn="ctr">
               <a:buNone/>
             </a:pPr>
             <a:r>
@@ -5658,7 +5663,7 @@
           <a:bodyPr wrap="square" lIns="0" tIns="0" rIns="0" bIns="0" rtlCol="0" anchor="ctr"/>
           <a:lstStyle/>
           <a:p>
-            <a:pPr algn="ctr" indent="0" marL="0">
+            <a:pPr marL="0" indent="0" algn="ctr">
               <a:buNone/>
             </a:pPr>
             <a:r>
@@ -5697,7 +5702,7 @@
           <a:bodyPr wrap="square" lIns="0" tIns="0" rIns="0" bIns="0" rtlCol="0" anchor="ctr"/>
           <a:lstStyle/>
           <a:p>
-            <a:pPr algn="ctr" indent="0" marL="0">
+            <a:pPr marL="0" indent="0" algn="ctr">
               <a:buNone/>
             </a:pPr>
             <a:r>
@@ -5736,7 +5741,7 @@
           <a:bodyPr wrap="square" lIns="0" tIns="0" rIns="0" bIns="0" rtlCol="0" anchor="ctr"/>
           <a:lstStyle/>
           <a:p>
-            <a:pPr algn="ctr" indent="0" marL="0">
+            <a:pPr marL="0" indent="0" algn="ctr">
               <a:buNone/>
             </a:pPr>
             <a:r>
@@ -5770,6 +5775,7 @@
         <a:solidFill>
           <a:srgbClr val="FFFFFF"/>
         </a:solidFill>
+        <a:effectLst/>
       </p:bgPr>
     </p:bg>
     <p:spTree>
@@ -5807,7 +5813,7 @@
           <a:bodyPr wrap="square" lIns="0" tIns="0" rIns="0" bIns="0" rtlCol="0" anchor="ctr"/>
           <a:lstStyle/>
           <a:p>
-            <a:pPr indent="0" marL="0">
+            <a:pPr marL="0" indent="0">
               <a:buNone/>
             </a:pPr>
             <a:r>
@@ -5846,7 +5852,7 @@
           <a:bodyPr wrap="square" lIns="0" tIns="0" rIns="0" bIns="0" rtlCol="0" anchor="ctr"/>
           <a:lstStyle/>
           <a:p>
-            <a:pPr indent="0" marL="0">
+            <a:pPr marL="0" indent="0">
               <a:buNone/>
             </a:pPr>
             <a:r>
@@ -5883,6 +5889,13 @@
           </a:solidFill>
           <a:ln/>
         </p:spPr>
+        <p:txBody>
+          <a:bodyPr/>
+          <a:lstStyle/>
+          <a:p>
+            <a:endParaRPr lang="zh-CN" altLang="en-US"/>
+          </a:p>
+        </p:txBody>
       </p:sp>
       <p:sp>
         <p:nvSpPr>
@@ -5905,7 +5918,7 @@
           <a:bodyPr wrap="square" lIns="0" tIns="0" rIns="0" bIns="0" rtlCol="0" anchor="ctr"/>
           <a:lstStyle/>
           <a:p>
-            <a:pPr algn="ctr" indent="0" marL="0">
+            <a:pPr marL="0" indent="0" algn="ctr">
               <a:buNone/>
             </a:pPr>
             <a:r>
@@ -5944,11 +5957,11 @@
           <a:bodyPr wrap="square" lIns="0" tIns="0" rIns="0" bIns="0" rtlCol="0" anchor="ctr"/>
           <a:lstStyle/>
           <a:p>
-            <a:pPr algn="ctr" indent="0" marL="0">
-              <a:buNone/>
-            </a:pPr>
-            <a:r>
-              <a:rPr lang="en-US" sz="1200" spc="200" kern="0" dirty="0">
+            <a:pPr marL="0" indent="0" algn="ctr">
+              <a:buNone/>
+            </a:pPr>
+            <a:r>
+              <a:rPr lang="en-US" sz="1200" kern="0" spc="200" dirty="0">
                 <a:solidFill>
                   <a:srgbClr val="64748B"/>
                 </a:solidFill>
@@ -5981,6 +5994,13 @@
           </a:solidFill>
           <a:ln/>
         </p:spPr>
+        <p:txBody>
+          <a:bodyPr/>
+          <a:lstStyle/>
+          <a:p>
+            <a:endParaRPr lang="zh-CN" altLang="en-US"/>
+          </a:p>
+        </p:txBody>
       </p:sp>
       <p:sp>
         <p:nvSpPr>
@@ -6003,7 +6023,7 @@
           <a:bodyPr wrap="square" lIns="0" tIns="0" rIns="0" bIns="0" rtlCol="0" anchor="ctr"/>
           <a:lstStyle/>
           <a:p>
-            <a:pPr algn="ctr" indent="0" marL="0">
+            <a:pPr marL="0" indent="0" algn="ctr">
               <a:buNone/>
             </a:pPr>
             <a:r>
@@ -6042,11 +6062,11 @@
           <a:bodyPr wrap="square" lIns="0" tIns="0" rIns="0" bIns="0" rtlCol="0" anchor="ctr"/>
           <a:lstStyle/>
           <a:p>
-            <a:pPr algn="ctr" indent="0" marL="0">
-              <a:buNone/>
-            </a:pPr>
-            <a:r>
-              <a:rPr lang="en-US" sz="1200" spc="200" kern="0" dirty="0">
+            <a:pPr marL="0" indent="0" algn="ctr">
+              <a:buNone/>
+            </a:pPr>
+            <a:r>
+              <a:rPr lang="en-US" sz="1200" kern="0" spc="200" dirty="0">
                 <a:solidFill>
                   <a:srgbClr val="64748B"/>
                 </a:solidFill>
@@ -6079,6 +6099,13 @@
           </a:solidFill>
           <a:ln/>
         </p:spPr>
+        <p:txBody>
+          <a:bodyPr/>
+          <a:lstStyle/>
+          <a:p>
+            <a:endParaRPr lang="zh-CN" altLang="en-US"/>
+          </a:p>
+        </p:txBody>
       </p:sp>
       <p:sp>
         <p:nvSpPr>
@@ -6101,7 +6128,7 @@
           <a:bodyPr wrap="square" lIns="0" tIns="0" rIns="0" bIns="0" rtlCol="0" anchor="ctr"/>
           <a:lstStyle/>
           <a:p>
-            <a:pPr algn="ctr" indent="0" marL="0">
+            <a:pPr marL="0" indent="0" algn="ctr">
               <a:buNone/>
             </a:pPr>
             <a:r>
@@ -6140,11 +6167,11 @@
           <a:bodyPr wrap="square" lIns="0" tIns="0" rIns="0" bIns="0" rtlCol="0" anchor="ctr"/>
           <a:lstStyle/>
           <a:p>
-            <a:pPr algn="ctr" indent="0" marL="0">
-              <a:buNone/>
-            </a:pPr>
-            <a:r>
-              <a:rPr lang="en-US" sz="1200" spc="200" kern="0" dirty="0">
+            <a:pPr marL="0" indent="0" algn="ctr">
+              <a:buNone/>
+            </a:pPr>
+            <a:r>
+              <a:rPr lang="en-US" sz="1200" kern="0" spc="200" dirty="0">
                 <a:solidFill>
                   <a:srgbClr val="64748B"/>
                 </a:solidFill>
@@ -6177,6 +6204,13 @@
           </a:solidFill>
           <a:ln/>
         </p:spPr>
+        <p:txBody>
+          <a:bodyPr/>
+          <a:lstStyle/>
+          <a:p>
+            <a:endParaRPr lang="zh-CN" altLang="en-US"/>
+          </a:p>
+        </p:txBody>
       </p:sp>
       <p:sp>
         <p:nvSpPr>
@@ -6199,7 +6233,7 @@
           <a:bodyPr wrap="square" lIns="0" tIns="0" rIns="0" bIns="0" rtlCol="0" anchor="ctr"/>
           <a:lstStyle/>
           <a:p>
-            <a:pPr algn="ctr" indent="0" marL="0">
+            <a:pPr marL="0" indent="0" algn="ctr">
               <a:buNone/>
             </a:pPr>
             <a:r>
@@ -6238,11 +6272,11 @@
           <a:bodyPr wrap="square" lIns="0" tIns="0" rIns="0" bIns="0" rtlCol="0" anchor="ctr"/>
           <a:lstStyle/>
           <a:p>
-            <a:pPr algn="ctr" indent="0" marL="0">
-              <a:buNone/>
-            </a:pPr>
-            <a:r>
-              <a:rPr lang="en-US" sz="1200" spc="200" kern="0" dirty="0">
+            <a:pPr marL="0" indent="0" algn="ctr">
+              <a:buNone/>
+            </a:pPr>
+            <a:r>
+              <a:rPr lang="en-US" sz="1200" kern="0" spc="200" dirty="0">
                 <a:solidFill>
                   <a:srgbClr val="64748B"/>
                 </a:solidFill>
@@ -6258,15 +6292,15 @@
       </p:sp>
       <p:pic>
         <p:nvPicPr>
-          <p:cNvPr id="16" name="Image 0" descr="preencoded.png">    </p:cNvPr>
+          <p:cNvPr id="16" name="Image 0" descr="preencoded.png"/>
           <p:cNvPicPr>
             <a:picLocks noChangeAspect="1"/>
           </p:cNvPicPr>
           <p:nvPr/>
         </p:nvPicPr>
         <p:blipFill>
-          <a:blip r:embed="rId1"/>
-          <a:srcRect l="0" r="0" t="0" b="0"/>
+          <a:blip r:embed="rId3"/>
+          <a:srcRect/>
           <a:stretch/>
         </p:blipFill>
         <p:spPr>
@@ -6300,7 +6334,7 @@
           <a:bodyPr wrap="square" lIns="0" tIns="0" rIns="0" bIns="0" rtlCol="0" anchor="ctr"/>
           <a:lstStyle/>
           <a:p>
-            <a:pPr algn="ctr" indent="0" marL="0">
+            <a:pPr marL="0" indent="0" algn="ctr">
               <a:buNone/>
             </a:pPr>
             <a:r>
@@ -6334,6 +6368,7 @@
         <a:solidFill>
           <a:srgbClr val="FFFFFF"/>
         </a:solidFill>
+        <a:effectLst/>
       </p:bgPr>
     </p:bg>
     <p:spTree>
@@ -6371,7 +6406,7 @@
           <a:bodyPr wrap="square" lIns="0" tIns="0" rIns="0" bIns="0" rtlCol="0" anchor="ctr"/>
           <a:lstStyle/>
           <a:p>
-            <a:pPr indent="0" marL="0">
+            <a:pPr marL="0" indent="0">
               <a:buNone/>
             </a:pPr>
             <a:r>
@@ -6410,7 +6445,7 @@
           <a:bodyPr wrap="square" lIns="0" tIns="0" rIns="0" bIns="0" rtlCol="0" anchor="ctr"/>
           <a:lstStyle/>
           <a:p>
-            <a:pPr indent="0" marL="0">
+            <a:pPr marL="0" indent="0">
               <a:buNone/>
             </a:pPr>
             <a:r>
@@ -6452,6 +6487,13 @@
             <a:prstDash val="solid"/>
           </a:ln>
         </p:spPr>
+        <p:txBody>
+          <a:bodyPr/>
+          <a:lstStyle/>
+          <a:p>
+            <a:endParaRPr lang="zh-CN" altLang="en-US"/>
+          </a:p>
+        </p:txBody>
       </p:sp>
       <p:sp>
         <p:nvSpPr>
@@ -6474,7 +6516,7 @@
           <a:bodyPr wrap="square" lIns="0" tIns="0" rIns="0" bIns="0" rtlCol="0" anchor="ctr"/>
           <a:lstStyle/>
           <a:p>
-            <a:pPr algn="ctr" indent="0" marL="0">
+            <a:pPr marL="0" indent="0" algn="ctr">
               <a:buNone/>
             </a:pPr>
             <a:r>
@@ -6516,6 +6558,13 @@
             <a:prstDash val="solid"/>
           </a:ln>
         </p:spPr>
+        <p:txBody>
+          <a:bodyPr/>
+          <a:lstStyle/>
+          <a:p>
+            <a:endParaRPr lang="zh-CN" altLang="en-US"/>
+          </a:p>
+        </p:txBody>
       </p:sp>
       <p:sp>
         <p:nvSpPr>
@@ -6538,7 +6587,7 @@
           <a:bodyPr wrap="square" lIns="0" tIns="0" rIns="0" bIns="0" rtlCol="0" anchor="ctr"/>
           <a:lstStyle/>
           <a:p>
-            <a:pPr algn="ctr" indent="0" marL="0">
+            <a:pPr marL="0" indent="0" algn="ctr">
               <a:buNone/>
             </a:pPr>
             <a:r>
@@ -6580,6 +6629,13 @@
             <a:prstDash val="solid"/>
           </a:ln>
         </p:spPr>
+        <p:txBody>
+          <a:bodyPr/>
+          <a:lstStyle/>
+          <a:p>
+            <a:endParaRPr lang="zh-CN" altLang="en-US"/>
+          </a:p>
+        </p:txBody>
       </p:sp>
       <p:sp>
         <p:nvSpPr>
@@ -6602,7 +6658,7 @@
           <a:bodyPr wrap="square" lIns="0" tIns="0" rIns="0" bIns="0" rtlCol="0" anchor="ctr"/>
           <a:lstStyle/>
           <a:p>
-            <a:pPr algn="ctr" indent="0" marL="0">
+            <a:pPr marL="0" indent="0" algn="ctr">
               <a:buNone/>
             </a:pPr>
             <a:r>
@@ -6644,6 +6700,13 @@
             <a:prstDash val="solid"/>
           </a:ln>
         </p:spPr>
+        <p:txBody>
+          <a:bodyPr/>
+          <a:lstStyle/>
+          <a:p>
+            <a:endParaRPr lang="zh-CN" altLang="en-US"/>
+          </a:p>
+        </p:txBody>
       </p:sp>
       <p:sp>
         <p:nvSpPr>
@@ -6666,7 +6729,7 @@
           <a:bodyPr wrap="square" lIns="0" tIns="0" rIns="0" bIns="0" rtlCol="0" anchor="ctr"/>
           <a:lstStyle/>
           <a:p>
-            <a:pPr algn="ctr" indent="0" marL="0">
+            <a:pPr marL="0" indent="0" algn="ctr">
               <a:buNone/>
             </a:pPr>
             <a:r>
@@ -6703,6 +6766,13 @@
           </a:solidFill>
           <a:ln/>
         </p:spPr>
+        <p:txBody>
+          <a:bodyPr/>
+          <a:lstStyle/>
+          <a:p>
+            <a:endParaRPr lang="zh-CN" altLang="en-US"/>
+          </a:p>
+        </p:txBody>
       </p:sp>
       <p:sp>
         <p:nvSpPr>
@@ -6725,7 +6795,7 @@
           <a:bodyPr wrap="square" lIns="0" tIns="0" rIns="0" bIns="0" rtlCol="0" anchor="ctr"/>
           <a:lstStyle/>
           <a:p>
-            <a:pPr algn="ctr" indent="0" marL="0">
+            <a:pPr marL="0" indent="0" algn="ctr">
               <a:buNone/>
             </a:pPr>
             <a:r>
@@ -6767,6 +6837,13 @@
             <a:prstDash val="solid"/>
           </a:ln>
         </p:spPr>
+        <p:txBody>
+          <a:bodyPr/>
+          <a:lstStyle/>
+          <a:p>
+            <a:endParaRPr lang="zh-CN" altLang="en-US"/>
+          </a:p>
+        </p:txBody>
       </p:sp>
       <p:sp>
         <p:nvSpPr>
@@ -6789,7 +6866,7 @@
           <a:bodyPr wrap="square" lIns="0" tIns="0" rIns="0" bIns="0" rtlCol="0" anchor="ctr"/>
           <a:lstStyle/>
           <a:p>
-            <a:pPr algn="ctr" indent="0" marL="0">
+            <a:pPr marL="0" indent="0" algn="ctr">
               <a:buNone/>
             </a:pPr>
             <a:r>
@@ -6831,6 +6908,13 @@
             <a:prstDash val="solid"/>
           </a:ln>
         </p:spPr>
+        <p:txBody>
+          <a:bodyPr/>
+          <a:lstStyle/>
+          <a:p>
+            <a:endParaRPr lang="zh-CN" altLang="en-US"/>
+          </a:p>
+        </p:txBody>
       </p:sp>
       <p:sp>
         <p:nvSpPr>
@@ -6853,7 +6937,7 @@
           <a:bodyPr wrap="square" lIns="0" tIns="0" rIns="0" bIns="0" rtlCol="0" anchor="ctr"/>
           <a:lstStyle/>
           <a:p>
-            <a:pPr algn="ctr" indent="0" marL="0">
+            <a:pPr marL="0" indent="0" algn="ctr">
               <a:buNone/>
             </a:pPr>
             <a:r>
@@ -6895,6 +6979,13 @@
             <a:prstDash val="solid"/>
           </a:ln>
         </p:spPr>
+        <p:txBody>
+          <a:bodyPr/>
+          <a:lstStyle/>
+          <a:p>
+            <a:endParaRPr lang="zh-CN" altLang="en-US"/>
+          </a:p>
+        </p:txBody>
       </p:sp>
       <p:sp>
         <p:nvSpPr>
@@ -6917,7 +7008,7 @@
           <a:bodyPr wrap="square" lIns="0" tIns="0" rIns="0" bIns="0" rtlCol="0" anchor="ctr"/>
           <a:lstStyle/>
           <a:p>
-            <a:pPr algn="ctr" indent="0" marL="0">
+            <a:pPr marL="0" indent="0" algn="ctr">
               <a:buNone/>
             </a:pPr>
             <a:r>
@@ -6959,6 +7050,13 @@
             <a:prstDash val="solid"/>
           </a:ln>
         </p:spPr>
+        <p:txBody>
+          <a:bodyPr/>
+          <a:lstStyle/>
+          <a:p>
+            <a:endParaRPr lang="zh-CN" altLang="en-US"/>
+          </a:p>
+        </p:txBody>
       </p:sp>
       <p:sp>
         <p:nvSpPr>
@@ -6981,7 +7079,7 @@
           <a:bodyPr wrap="square" lIns="0" tIns="0" rIns="0" bIns="0" rtlCol="0" anchor="ctr"/>
           <a:lstStyle/>
           <a:p>
-            <a:pPr algn="ctr" indent="0" marL="0">
+            <a:pPr marL="0" indent="0" algn="ctr">
               <a:buNone/>
             </a:pPr>
             <a:r>
@@ -7021,6 +7119,13 @@
             <a:prstDash val="dash"/>
           </a:ln>
         </p:spPr>
+        <p:txBody>
+          <a:bodyPr/>
+          <a:lstStyle/>
+          <a:p>
+            <a:endParaRPr lang="zh-CN" altLang="en-US"/>
+          </a:p>
+        </p:txBody>
       </p:sp>
       <p:sp>
         <p:nvSpPr>
@@ -7044,6 +7149,13 @@
             <a:prstDash val="dash"/>
           </a:ln>
         </p:spPr>
+        <p:txBody>
+          <a:bodyPr/>
+          <a:lstStyle/>
+          <a:p>
+            <a:endParaRPr lang="zh-CN" altLang="en-US"/>
+          </a:p>
+        </p:txBody>
       </p:sp>
       <p:sp>
         <p:nvSpPr>
@@ -7054,7 +7166,7 @@
         <p:spPr>
           <a:xfrm>
             <a:off x="2834640" y="3246120"/>
-            <a:ext cx="6126480" cy="-594360"/>
+            <a:ext cx="6126480" cy="0"/>
           </a:xfrm>
           <a:prstGeom prst="line">
             <a:avLst/>
@@ -7067,6 +7179,13 @@
             <a:prstDash val="dash"/>
           </a:ln>
         </p:spPr>
+        <p:txBody>
+          <a:bodyPr/>
+          <a:lstStyle/>
+          <a:p>
+            <a:endParaRPr lang="zh-CN" altLang="en-US"/>
+          </a:p>
+        </p:txBody>
       </p:sp>
       <p:sp>
         <p:nvSpPr>
@@ -7077,7 +7196,7 @@
         <p:spPr>
           <a:xfrm>
             <a:off x="2697480" y="3840480"/>
-            <a:ext cx="6400800" cy="-1783080"/>
+            <a:ext cx="6400800" cy="0"/>
           </a:xfrm>
           <a:prstGeom prst="line">
             <a:avLst/>
@@ -7090,6 +7209,13 @@
             <a:prstDash val="dash"/>
           </a:ln>
         </p:spPr>
+        <p:txBody>
+          <a:bodyPr/>
+          <a:lstStyle/>
+          <a:p>
+            <a:endParaRPr lang="zh-CN" altLang="en-US"/>
+          </a:p>
+        </p:txBody>
       </p:sp>
       <p:sp>
         <p:nvSpPr>
@@ -7112,11 +7238,11 @@
           <a:bodyPr wrap="square" lIns="0" tIns="0" rIns="0" bIns="0" rtlCol="0" anchor="ctr"/>
           <a:lstStyle/>
           <a:p>
-            <a:pPr algn="ctr" indent="0" marL="0">
-              <a:buNone/>
-            </a:pPr>
-            <a:r>
-              <a:rPr lang="en-US" sz="1100" b="1" spc="200" kern="0" dirty="0">
+            <a:pPr marL="0" indent="0" algn="ctr">
+              <a:buNone/>
+            </a:pPr>
+            <a:r>
+              <a:rPr lang="en-US" sz="1100" b="1" kern="0" spc="200" dirty="0">
                 <a:solidFill>
                   <a:srgbClr val="3B82F6"/>
                 </a:solidFill>
@@ -7151,11 +7277,11 @@
           <a:bodyPr wrap="square" lIns="0" tIns="0" rIns="0" bIns="0" rtlCol="0" anchor="ctr"/>
           <a:lstStyle/>
           <a:p>
-            <a:pPr algn="ctr" indent="0" marL="0">
-              <a:buNone/>
-            </a:pPr>
-            <a:r>
-              <a:rPr lang="en-US" sz="1100" b="1" spc="200" kern="0" dirty="0">
+            <a:pPr marL="0" indent="0" algn="ctr">
+              <a:buNone/>
+            </a:pPr>
+            <a:r>
+              <a:rPr lang="en-US" sz="1100" b="1" kern="0" spc="200" dirty="0">
                 <a:solidFill>
                   <a:srgbClr val="F59E0B"/>
                 </a:solidFill>
@@ -7190,7 +7316,7 @@
           <a:bodyPr wrap="square" lIns="0" tIns="0" rIns="0" bIns="0" rtlCol="0" anchor="ctr"/>
           <a:lstStyle/>
           <a:p>
-            <a:pPr algn="ctr" indent="0" marL="0">
+            <a:pPr marL="0" indent="0" algn="ctr">
               <a:buNone/>
             </a:pPr>
             <a:r>
@@ -7230,6 +7356,13 @@
             <a:prstDash val="dash"/>
           </a:ln>
         </p:spPr>
+        <p:txBody>
+          <a:bodyPr/>
+          <a:lstStyle/>
+          <a:p>
+            <a:endParaRPr lang="zh-CN" altLang="en-US"/>
+          </a:p>
+        </p:txBody>
       </p:sp>
       <p:sp>
         <p:nvSpPr>
@@ -7252,7 +7385,7 @@
           <a:bodyPr wrap="square" lIns="0" tIns="0" rIns="0" bIns="0" rtlCol="0" anchor="ctr"/>
           <a:lstStyle/>
           <a:p>
-            <a:pPr algn="ctr" indent="0" marL="0">
+            <a:pPr marL="0" indent="0" algn="ctr">
               <a:buNone/>
             </a:pPr>
             <a:r>
@@ -7289,6 +7422,13 @@
           </a:solidFill>
           <a:ln/>
         </p:spPr>
+        <p:txBody>
+          <a:bodyPr/>
+          <a:lstStyle/>
+          <a:p>
+            <a:endParaRPr lang="zh-CN" altLang="en-US"/>
+          </a:p>
+        </p:txBody>
       </p:sp>
       <p:sp>
         <p:nvSpPr>
@@ -7311,11 +7451,11 @@
           <a:bodyPr wrap="square" lIns="0" tIns="0" rIns="0" bIns="0" rtlCol="0" anchor="ctr"/>
           <a:lstStyle/>
           <a:p>
-            <a:pPr indent="0" marL="0">
-              <a:buNone/>
-            </a:pPr>
-            <a:r>
-              <a:rPr lang="en-US" sz="1100" b="1" spc="200" kern="0" dirty="0">
+            <a:pPr marL="0" indent="0">
+              <a:buNone/>
+            </a:pPr>
+            <a:r>
+              <a:rPr lang="en-US" sz="1100" b="1" kern="0" spc="200" dirty="0">
                 <a:solidFill>
                   <a:srgbClr val="3B82F6"/>
                 </a:solidFill>
@@ -7350,7 +7490,7 @@
           <a:bodyPr wrap="square" lIns="0" tIns="0" rIns="0" bIns="0" rtlCol="0" anchor="ctr"/>
           <a:lstStyle/>
           <a:p>
-            <a:pPr indent="0" marL="0">
+            <a:pPr marL="0" indent="0">
               <a:buNone/>
             </a:pPr>
             <a:r>
@@ -7389,11 +7529,11 @@
           <a:bodyPr wrap="square" lIns="0" tIns="0" rIns="0" bIns="0" rtlCol="0" anchor="ctr"/>
           <a:lstStyle/>
           <a:p>
-            <a:pPr indent="0" marL="0">
-              <a:buNone/>
-            </a:pPr>
-            <a:r>
-              <a:rPr lang="en-US" sz="1100" b="1" spc="200" kern="0" dirty="0">
+            <a:pPr marL="0" indent="0">
+              <a:buNone/>
+            </a:pPr>
+            <a:r>
+              <a:rPr lang="en-US" sz="1100" b="1" kern="0" spc="200" dirty="0">
                 <a:solidFill>
                   <a:srgbClr val="10B981"/>
                 </a:solidFill>
@@ -7428,7 +7568,7 @@
           <a:bodyPr wrap="square" lIns="0" tIns="0" rIns="0" bIns="0" rtlCol="0" anchor="ctr"/>
           <a:lstStyle/>
           <a:p>
-            <a:pPr indent="0" marL="0">
+            <a:pPr marL="0" indent="0">
               <a:buNone/>
             </a:pPr>
             <a:r>
@@ -7467,11 +7607,11 @@
           <a:bodyPr wrap="square" lIns="0" tIns="0" rIns="0" bIns="0" rtlCol="0" anchor="ctr"/>
           <a:lstStyle/>
           <a:p>
-            <a:pPr indent="0" marL="0">
-              <a:buNone/>
-            </a:pPr>
-            <a:r>
-              <a:rPr lang="en-US" sz="1100" b="1" spc="200" kern="0" dirty="0">
+            <a:pPr marL="0" indent="0">
+              <a:buNone/>
+            </a:pPr>
+            <a:r>
+              <a:rPr lang="en-US" sz="1100" b="1" kern="0" spc="200" dirty="0">
                 <a:solidFill>
                   <a:srgbClr val="1E2761"/>
                 </a:solidFill>
@@ -7506,7 +7646,7 @@
           <a:bodyPr wrap="square" lIns="0" tIns="0" rIns="0" bIns="0" rtlCol="0" anchor="ctr"/>
           <a:lstStyle/>
           <a:p>
-            <a:pPr indent="0" marL="0">
+            <a:pPr marL="0" indent="0">
               <a:buNone/>
             </a:pPr>
             <a:r>
@@ -7540,6 +7680,7 @@
         <a:solidFill>
           <a:srgbClr val="FFFFFF"/>
         </a:solidFill>
+        <a:effectLst/>
       </p:bgPr>
     </p:bg>
     <p:spTree>
@@ -7577,7 +7718,7 @@
           <a:bodyPr wrap="square" lIns="0" tIns="0" rIns="0" bIns="0" rtlCol="0" anchor="ctr"/>
           <a:lstStyle/>
           <a:p>
-            <a:pPr indent="0" marL="0">
+            <a:pPr marL="0" indent="0">
               <a:buNone/>
             </a:pPr>
             <a:r>
@@ -7614,6 +7755,13 @@
           </a:solidFill>
           <a:ln/>
         </p:spPr>
+        <p:txBody>
+          <a:bodyPr/>
+          <a:lstStyle/>
+          <a:p>
+            <a:endParaRPr lang="zh-CN" altLang="en-US"/>
+          </a:p>
+        </p:txBody>
       </p:sp>
       <p:sp>
         <p:nvSpPr>
@@ -7634,6 +7782,13 @@
           </a:solidFill>
           <a:ln/>
         </p:spPr>
+        <p:txBody>
+          <a:bodyPr/>
+          <a:lstStyle/>
+          <a:p>
+            <a:endParaRPr lang="zh-CN" altLang="en-US"/>
+          </a:p>
+        </p:txBody>
       </p:sp>
       <p:sp>
         <p:nvSpPr>
@@ -7656,11 +7811,11 @@
           <a:bodyPr wrap="square" lIns="0" tIns="0" rIns="0" bIns="0" rtlCol="0" anchor="ctr"/>
           <a:lstStyle/>
           <a:p>
-            <a:pPr indent="0" marL="0">
-              <a:buNone/>
-            </a:pPr>
-            <a:r>
-              <a:rPr lang="en-US" sz="1200" b="1" spc="300" kern="0" dirty="0">
+            <a:pPr marL="0" indent="0">
+              <a:buNone/>
+            </a:pPr>
+            <a:r>
+              <a:rPr lang="en-US" sz="1200" b="1" kern="0" spc="300" dirty="0">
                 <a:solidFill>
                   <a:srgbClr val="92400E"/>
                 </a:solidFill>
@@ -7695,7 +7850,7 @@
           <a:bodyPr wrap="square" lIns="0" tIns="0" rIns="0" bIns="0" rtlCol="0" anchor="ctr"/>
           <a:lstStyle/>
           <a:p>
-            <a:pPr indent="0" marL="0">
+            <a:pPr marL="0" indent="0">
               <a:buNone/>
             </a:pPr>
             <a:r>
@@ -7732,6 +7887,13 @@
           </a:solidFill>
           <a:ln/>
         </p:spPr>
+        <p:txBody>
+          <a:bodyPr/>
+          <a:lstStyle/>
+          <a:p>
+            <a:endParaRPr lang="zh-CN" altLang="en-US"/>
+          </a:p>
+        </p:txBody>
       </p:sp>
       <p:sp>
         <p:nvSpPr>
@@ -7754,7 +7916,7 @@
           <a:bodyPr wrap="square" lIns="0" tIns="0" rIns="0" bIns="0" rtlCol="0" anchor="ctr"/>
           <a:lstStyle/>
           <a:p>
-            <a:pPr indent="0" marL="0">
+            <a:pPr marL="0" indent="0">
               <a:buNone/>
             </a:pPr>
             <a:r>
@@ -7793,7 +7955,7 @@
           <a:bodyPr wrap="square" lIns="0" tIns="0" rIns="0" bIns="0" rtlCol="0" anchor="ctr"/>
           <a:lstStyle/>
           <a:p>
-            <a:pPr indent="0" marL="0">
+            <a:pPr marL="0" indent="0">
               <a:buNone/>
             </a:pPr>
             <a:r>
@@ -7832,7 +7994,7 @@
           <a:bodyPr wrap="square" lIns="0" tIns="0" rIns="0" bIns="0" rtlCol="0" anchor="ctr"/>
           <a:lstStyle/>
           <a:p>
-            <a:pPr indent="0" marL="0">
+            <a:pPr marL="0" indent="0">
               <a:spcAft>
                 <a:spcPts val="300"/>
               </a:spcAft>
@@ -7849,13 +8011,38 @@
               </a:rPr>
               <a:t>✓ </a:t>
             </a:r>
-            <a:pPr indent="0" marL="0">
+            <a:r>
+              <a:rPr lang="en-US" sz="1300" dirty="0">
+                <a:solidFill>
+                  <a:srgbClr val="0F172A"/>
+                </a:solidFill>
+                <a:latin typeface="Calibri" pitchFamily="34" charset="0"/>
+                <a:ea typeface="Calibri" pitchFamily="34" charset="-122"/>
+                <a:cs typeface="Calibri" pitchFamily="34" charset="-120"/>
+              </a:rPr>
+              <a:t>Good for pixel-level accuracy</a:t>
+            </a:r>
+            <a:endParaRPr lang="en-US" sz="1300" dirty="0"/>
+          </a:p>
+          <a:p>
+            <a:pPr marL="0" indent="0">
               <a:spcAft>
                 <a:spcPts val="300"/>
               </a:spcAft>
               <a:buNone/>
             </a:pPr>
             <a:r>
+              <a:rPr lang="en-US" sz="1300" b="1" dirty="0">
+                <a:solidFill>
+                  <a:srgbClr val="F96167"/>
+                </a:solidFill>
+                <a:latin typeface="Calibri" pitchFamily="34" charset="0"/>
+                <a:ea typeface="Calibri" pitchFamily="34" charset="-122"/>
+                <a:cs typeface="Calibri" pitchFamily="34" charset="-120"/>
+              </a:rPr>
+              <a:t>✗ </a:t>
+            </a:r>
+            <a:r>
               <a:rPr lang="en-US" sz="1300" dirty="0">
                 <a:solidFill>
                   <a:srgbClr val="0F172A"/>
@@ -7864,12 +8051,139 @@
                 <a:ea typeface="Calibri" pitchFamily="34" charset="-122"/>
                 <a:cs typeface="Calibri" pitchFamily="34" charset="-120"/>
               </a:rPr>
-              <a:t>Good for pixel-level accuracy</a:t>
+              <a:t>Dominated by background pixels</a:t>
             </a:r>
             <a:endParaRPr lang="en-US" sz="1300" dirty="0"/>
           </a:p>
-          <a:p>
-            <a:pPr indent="0" marL="0">
+        </p:txBody>
+      </p:sp>
+      <p:sp>
+        <p:nvSpPr>
+          <p:cNvPr id="11" name="Shape 9"/>
+          <p:cNvSpPr/>
+          <p:nvPr/>
+        </p:nvSpPr>
+        <p:spPr>
+          <a:xfrm>
+            <a:off x="6217920" y="2651760"/>
+            <a:ext cx="5394960" cy="1828800"/>
+          </a:xfrm>
+          <a:prstGeom prst="rect">
+            <a:avLst/>
+          </a:prstGeom>
+          <a:solidFill>
+            <a:srgbClr val="F1F5F9"/>
+          </a:solidFill>
+          <a:ln/>
+        </p:spPr>
+        <p:txBody>
+          <a:bodyPr/>
+          <a:lstStyle/>
+          <a:p>
+            <a:endParaRPr lang="zh-CN" altLang="en-US"/>
+          </a:p>
+        </p:txBody>
+      </p:sp>
+      <p:sp>
+        <p:nvSpPr>
+          <p:cNvPr id="12" name="Text 10"/>
+          <p:cNvSpPr/>
+          <p:nvPr/>
+        </p:nvSpPr>
+        <p:spPr>
+          <a:xfrm>
+            <a:off x="6492240" y="2788920"/>
+            <a:ext cx="5029200" cy="365760"/>
+          </a:xfrm>
+          <a:prstGeom prst="rect">
+            <a:avLst/>
+          </a:prstGeom>
+          <a:noFill/>
+          <a:ln/>
+        </p:spPr>
+        <p:txBody>
+          <a:bodyPr wrap="square" lIns="0" tIns="0" rIns="0" bIns="0" rtlCol="0" anchor="ctr"/>
+          <a:lstStyle/>
+          <a:p>
+            <a:pPr marL="0" indent="0">
+              <a:buNone/>
+            </a:pPr>
+            <a:r>
+              <a:rPr lang="en-US" sz="1800" b="1" dirty="0">
+                <a:solidFill>
+                  <a:srgbClr val="1E2761"/>
+                </a:solidFill>
+                <a:latin typeface="Calibri" pitchFamily="34" charset="0"/>
+                <a:ea typeface="Calibri" pitchFamily="34" charset="-122"/>
+                <a:cs typeface="Calibri" pitchFamily="34" charset="-120"/>
+              </a:rPr>
+              <a:t>Dice Loss</a:t>
+            </a:r>
+            <a:endParaRPr lang="en-US" sz="1800" dirty="0"/>
+          </a:p>
+        </p:txBody>
+      </p:sp>
+      <p:sp>
+        <p:nvSpPr>
+          <p:cNvPr id="13" name="Text 11"/>
+          <p:cNvSpPr/>
+          <p:nvPr/>
+        </p:nvSpPr>
+        <p:spPr>
+          <a:xfrm>
+            <a:off x="6492240" y="3200400"/>
+            <a:ext cx="5029200" cy="365760"/>
+          </a:xfrm>
+          <a:prstGeom prst="rect">
+            <a:avLst/>
+          </a:prstGeom>
+          <a:noFill/>
+          <a:ln/>
+        </p:spPr>
+        <p:txBody>
+          <a:bodyPr wrap="square" lIns="0" tIns="0" rIns="0" bIns="0" rtlCol="0" anchor="ctr"/>
+          <a:lstStyle/>
+          <a:p>
+            <a:pPr marL="0" indent="0">
+              <a:buNone/>
+            </a:pPr>
+            <a:r>
+              <a:rPr lang="en-US" sz="1400" dirty="0">
+                <a:solidFill>
+                  <a:srgbClr val="F96167"/>
+                </a:solidFill>
+                <a:latin typeface="Consolas" pitchFamily="34" charset="0"/>
+                <a:ea typeface="Consolas" pitchFamily="34" charset="-122"/>
+                <a:cs typeface="Consolas" pitchFamily="34" charset="-120"/>
+              </a:rPr>
+              <a:t>Dice = (2 × |A ∩ B|) / (|A| + |B|)</a:t>
+            </a:r>
+            <a:endParaRPr lang="en-US" sz="1400" dirty="0"/>
+          </a:p>
+        </p:txBody>
+      </p:sp>
+      <p:sp>
+        <p:nvSpPr>
+          <p:cNvPr id="14" name="Text 12"/>
+          <p:cNvSpPr/>
+          <p:nvPr/>
+        </p:nvSpPr>
+        <p:spPr>
+          <a:xfrm>
+            <a:off x="6492240" y="3611880"/>
+            <a:ext cx="5029200" cy="822960"/>
+          </a:xfrm>
+          <a:prstGeom prst="rect">
+            <a:avLst/>
+          </a:prstGeom>
+          <a:noFill/>
+          <a:ln/>
+        </p:spPr>
+        <p:txBody>
+          <a:bodyPr wrap="square" lIns="0" tIns="0" rIns="0" bIns="0" rtlCol="0" anchor="ctr"/>
+          <a:lstStyle/>
+          <a:p>
+            <a:pPr marL="0" indent="0">
               <a:spcAft>
                 <a:spcPts val="300"/>
               </a:spcAft>
@@ -7878,161 +8192,35 @@
             <a:r>
               <a:rPr lang="en-US" sz="1300" b="1" dirty="0">
                 <a:solidFill>
-                  <a:srgbClr val="F96167"/>
-                </a:solidFill>
-                <a:latin typeface="Calibri" pitchFamily="34" charset="0"/>
-                <a:ea typeface="Calibri" pitchFamily="34" charset="-122"/>
-                <a:cs typeface="Calibri" pitchFamily="34" charset="-120"/>
-              </a:rPr>
-              <a:t>✗ </a:t>
-            </a:r>
-            <a:pPr indent="0" marL="0">
+                  <a:srgbClr val="10B981"/>
+                </a:solidFill>
+                <a:latin typeface="Calibri" pitchFamily="34" charset="0"/>
+                <a:ea typeface="Calibri" pitchFamily="34" charset="-122"/>
+                <a:cs typeface="Calibri" pitchFamily="34" charset="-120"/>
+              </a:rPr>
+              <a:t>✓ </a:t>
+            </a:r>
+            <a:r>
+              <a:rPr lang="en-US" sz="1300" dirty="0">
+                <a:solidFill>
+                  <a:srgbClr val="0F172A"/>
+                </a:solidFill>
+                <a:latin typeface="Calibri" pitchFamily="34" charset="0"/>
+                <a:ea typeface="Calibri" pitchFamily="34" charset="-122"/>
+                <a:cs typeface="Calibri" pitchFamily="34" charset="-120"/>
+              </a:rPr>
+              <a:t>Optimizes overlap directly</a:t>
+            </a:r>
+            <a:endParaRPr lang="en-US" sz="1300" dirty="0"/>
+          </a:p>
+          <a:p>
+            <a:pPr marL="0" indent="0">
               <a:spcAft>
                 <a:spcPts val="300"/>
               </a:spcAft>
               <a:buNone/>
             </a:pPr>
             <a:r>
-              <a:rPr lang="en-US" sz="1300" dirty="0">
-                <a:solidFill>
-                  <a:srgbClr val="0F172A"/>
-                </a:solidFill>
-                <a:latin typeface="Calibri" pitchFamily="34" charset="0"/>
-                <a:ea typeface="Calibri" pitchFamily="34" charset="-122"/>
-                <a:cs typeface="Calibri" pitchFamily="34" charset="-120"/>
-              </a:rPr>
-              <a:t>Dominated by background pixels</a:t>
-            </a:r>
-            <a:endParaRPr lang="en-US" sz="1300" dirty="0"/>
-          </a:p>
-        </p:txBody>
-      </p:sp>
-      <p:sp>
-        <p:nvSpPr>
-          <p:cNvPr id="11" name="Shape 9"/>
-          <p:cNvSpPr/>
-          <p:nvPr/>
-        </p:nvSpPr>
-        <p:spPr>
-          <a:xfrm>
-            <a:off x="6217920" y="2651760"/>
-            <a:ext cx="5394960" cy="1828800"/>
-          </a:xfrm>
-          <a:prstGeom prst="rect">
-            <a:avLst/>
-          </a:prstGeom>
-          <a:solidFill>
-            <a:srgbClr val="F1F5F9"/>
-          </a:solidFill>
-          <a:ln/>
-        </p:spPr>
-      </p:sp>
-      <p:sp>
-        <p:nvSpPr>
-          <p:cNvPr id="12" name="Text 10"/>
-          <p:cNvSpPr/>
-          <p:nvPr/>
-        </p:nvSpPr>
-        <p:spPr>
-          <a:xfrm>
-            <a:off x="6492240" y="2788920"/>
-            <a:ext cx="5029200" cy="365760"/>
-          </a:xfrm>
-          <a:prstGeom prst="rect">
-            <a:avLst/>
-          </a:prstGeom>
-          <a:noFill/>
-          <a:ln/>
-        </p:spPr>
-        <p:txBody>
-          <a:bodyPr wrap="square" lIns="0" tIns="0" rIns="0" bIns="0" rtlCol="0" anchor="ctr"/>
-          <a:lstStyle/>
-          <a:p>
-            <a:pPr indent="0" marL="0">
-              <a:buNone/>
-            </a:pPr>
-            <a:r>
-              <a:rPr lang="en-US" sz="1800" b="1" dirty="0">
-                <a:solidFill>
-                  <a:srgbClr val="1E2761"/>
-                </a:solidFill>
-                <a:latin typeface="Calibri" pitchFamily="34" charset="0"/>
-                <a:ea typeface="Calibri" pitchFamily="34" charset="-122"/>
-                <a:cs typeface="Calibri" pitchFamily="34" charset="-120"/>
-              </a:rPr>
-              <a:t>Dice Loss</a:t>
-            </a:r>
-            <a:endParaRPr lang="en-US" sz="1800" dirty="0"/>
-          </a:p>
-        </p:txBody>
-      </p:sp>
-      <p:sp>
-        <p:nvSpPr>
-          <p:cNvPr id="13" name="Text 11"/>
-          <p:cNvSpPr/>
-          <p:nvPr/>
-        </p:nvSpPr>
-        <p:spPr>
-          <a:xfrm>
-            <a:off x="6492240" y="3200400"/>
-            <a:ext cx="5029200" cy="365760"/>
-          </a:xfrm>
-          <a:prstGeom prst="rect">
-            <a:avLst/>
-          </a:prstGeom>
-          <a:noFill/>
-          <a:ln/>
-        </p:spPr>
-        <p:txBody>
-          <a:bodyPr wrap="square" lIns="0" tIns="0" rIns="0" bIns="0" rtlCol="0" anchor="ctr"/>
-          <a:lstStyle/>
-          <a:p>
-            <a:pPr indent="0" marL="0">
-              <a:buNone/>
-            </a:pPr>
-            <a:r>
-              <a:rPr lang="en-US" sz="1400" dirty="0">
-                <a:solidFill>
-                  <a:srgbClr val="F96167"/>
-                </a:solidFill>
-                <a:latin typeface="Consolas" pitchFamily="34" charset="0"/>
-                <a:ea typeface="Consolas" pitchFamily="34" charset="-122"/>
-                <a:cs typeface="Consolas" pitchFamily="34" charset="-120"/>
-              </a:rPr>
-              <a:t>Dice = (2 × |A ∩ B|) / (|A| + |B|)</a:t>
-            </a:r>
-            <a:endParaRPr lang="en-US" sz="1400" dirty="0"/>
-          </a:p>
-        </p:txBody>
-      </p:sp>
-      <p:sp>
-        <p:nvSpPr>
-          <p:cNvPr id="14" name="Text 12"/>
-          <p:cNvSpPr/>
-          <p:nvPr/>
-        </p:nvSpPr>
-        <p:spPr>
-          <a:xfrm>
-            <a:off x="6492240" y="3611880"/>
-            <a:ext cx="5029200" cy="822960"/>
-          </a:xfrm>
-          <a:prstGeom prst="rect">
-            <a:avLst/>
-          </a:prstGeom>
-          <a:noFill/>
-          <a:ln/>
-        </p:spPr>
-        <p:txBody>
-          <a:bodyPr wrap="square" lIns="0" tIns="0" rIns="0" bIns="0" rtlCol="0" anchor="ctr"/>
-          <a:lstStyle/>
-          <a:p>
-            <a:pPr indent="0" marL="0">
-              <a:spcAft>
-                <a:spcPts val="300"/>
-              </a:spcAft>
-              <a:buNone/>
-            </a:pPr>
-            <a:r>
               <a:rPr lang="en-US" sz="1300" b="1" dirty="0">
                 <a:solidFill>
                   <a:srgbClr val="10B981"/>
@@ -8043,49 +8231,6 @@
               </a:rPr>
               <a:t>✓ </a:t>
             </a:r>
-            <a:pPr indent="0" marL="0">
-              <a:spcAft>
-                <a:spcPts val="300"/>
-              </a:spcAft>
-              <a:buNone/>
-            </a:pPr>
-            <a:r>
-              <a:rPr lang="en-US" sz="1300" dirty="0">
-                <a:solidFill>
-                  <a:srgbClr val="0F172A"/>
-                </a:solidFill>
-                <a:latin typeface="Calibri" pitchFamily="34" charset="0"/>
-                <a:ea typeface="Calibri" pitchFamily="34" charset="-122"/>
-                <a:cs typeface="Calibri" pitchFamily="34" charset="-120"/>
-              </a:rPr>
-              <a:t>Optimizes overlap directly</a:t>
-            </a:r>
-            <a:endParaRPr lang="en-US" sz="1300" dirty="0"/>
-          </a:p>
-          <a:p>
-            <a:pPr indent="0" marL="0">
-              <a:spcAft>
-                <a:spcPts val="300"/>
-              </a:spcAft>
-              <a:buNone/>
-            </a:pPr>
-            <a:r>
-              <a:rPr lang="en-US" sz="1300" b="1" dirty="0">
-                <a:solidFill>
-                  <a:srgbClr val="10B981"/>
-                </a:solidFill>
-                <a:latin typeface="Calibri" pitchFamily="34" charset="0"/>
-                <a:ea typeface="Calibri" pitchFamily="34" charset="-122"/>
-                <a:cs typeface="Calibri" pitchFamily="34" charset="-120"/>
-              </a:rPr>
-              <a:t>✓ </a:t>
-            </a:r>
-            <a:pPr indent="0" marL="0">
-              <a:spcAft>
-                <a:spcPts val="300"/>
-              </a:spcAft>
-              <a:buNone/>
-            </a:pPr>
             <a:r>
               <a:rPr lang="en-US" sz="1300" dirty="0">
                 <a:solidFill>
@@ -8120,6 +8265,13 @@
           </a:solidFill>
           <a:ln/>
         </p:spPr>
+        <p:txBody>
+          <a:bodyPr/>
+          <a:lstStyle/>
+          <a:p>
+            <a:endParaRPr lang="zh-CN" altLang="en-US"/>
+          </a:p>
+        </p:txBody>
       </p:sp>
       <p:sp>
         <p:nvSpPr>
@@ -8142,7 +8294,7 @@
           <a:bodyPr wrap="square" lIns="0" tIns="0" rIns="0" bIns="0" rtlCol="0" anchor="ctr"/>
           <a:lstStyle/>
           <a:p>
-            <a:pPr algn="ctr" indent="0" marL="0">
+            <a:pPr marL="0" indent="0" algn="ctr">
               <a:buNone/>
             </a:pPr>
             <a:r>
@@ -8181,7 +8333,7 @@
           <a:bodyPr wrap="square" lIns="0" tIns="0" rIns="0" bIns="0" rtlCol="0" anchor="ctr"/>
           <a:lstStyle/>
           <a:p>
-            <a:pPr indent="0" marL="0">
+            <a:pPr marL="0" indent="0">
               <a:buNone/>
             </a:pPr>
             <a:r>
@@ -8220,7 +8372,7 @@
           <a:bodyPr wrap="square" lIns="0" tIns="0" rIns="0" bIns="0" rtlCol="0" anchor="ctr"/>
           <a:lstStyle/>
           <a:p>
-            <a:pPr indent="0" marL="0">
+            <a:pPr marL="0" indent="0">
               <a:buNone/>
             </a:pPr>
             <a:r>
@@ -8254,6 +8406,7 @@
         <a:solidFill>
           <a:srgbClr val="FFFFFF"/>
         </a:solidFill>
+        <a:effectLst/>
       </p:bgPr>
     </p:bg>
     <p:spTree>
@@ -8291,7 +8444,7 @@
           <a:bodyPr wrap="square" lIns="0" tIns="0" rIns="0" bIns="0" rtlCol="0" anchor="ctr"/>
           <a:lstStyle/>
           <a:p>
-            <a:pPr indent="0" marL="0">
+            <a:pPr marL="0" indent="0">
               <a:buNone/>
             </a:pPr>
             <a:r>
@@ -8330,7 +8483,7 @@
           <a:bodyPr wrap="square" lIns="0" tIns="0" rIns="0" bIns="0" rtlCol="0" anchor="ctr"/>
           <a:lstStyle/>
           <a:p>
-            <a:pPr indent="0" marL="0">
+            <a:pPr marL="0" indent="0">
               <a:buNone/>
             </a:pPr>
             <a:r>
@@ -8367,6 +8520,13 @@
           </a:solidFill>
           <a:ln/>
         </p:spPr>
+        <p:txBody>
+          <a:bodyPr/>
+          <a:lstStyle/>
+          <a:p>
+            <a:endParaRPr lang="zh-CN" altLang="en-US"/>
+          </a:p>
+        </p:txBody>
       </p:sp>
       <p:sp>
         <p:nvSpPr>
@@ -8387,6 +8547,13 @@
           </a:solidFill>
           <a:ln/>
         </p:spPr>
+        <p:txBody>
+          <a:bodyPr/>
+          <a:lstStyle/>
+          <a:p>
+            <a:endParaRPr lang="zh-CN" altLang="en-US"/>
+          </a:p>
+        </p:txBody>
       </p:sp>
       <p:sp>
         <p:nvSpPr>
@@ -8409,11 +8576,11 @@
           <a:bodyPr wrap="square" lIns="0" tIns="0" rIns="0" bIns="0" rtlCol="0" anchor="ctr"/>
           <a:lstStyle/>
           <a:p>
-            <a:pPr indent="0" marL="0">
-              <a:buNone/>
-            </a:pPr>
-            <a:r>
-              <a:rPr lang="en-US" sz="1100" b="1" spc="300" kern="0" dirty="0">
+            <a:pPr marL="0" indent="0">
+              <a:buNone/>
+            </a:pPr>
+            <a:r>
+              <a:rPr lang="en-US" sz="1100" b="1" kern="0" spc="300" dirty="0">
                 <a:solidFill>
                   <a:srgbClr val="F96167"/>
                 </a:solidFill>
@@ -8448,7 +8615,7 @@
           <a:bodyPr wrap="square" lIns="0" tIns="0" rIns="0" bIns="0" rtlCol="0" anchor="ctr"/>
           <a:lstStyle/>
           <a:p>
-            <a:pPr indent="0" marL="0">
+            <a:pPr marL="0" indent="0">
               <a:buNone/>
             </a:pPr>
             <a:r>
@@ -8487,11 +8654,11 @@
           <a:bodyPr wrap="square" lIns="0" tIns="0" rIns="0" bIns="0" rtlCol="0" anchor="ctr"/>
           <a:lstStyle/>
           <a:p>
-            <a:pPr indent="0" marL="0">
-              <a:buNone/>
-            </a:pPr>
-            <a:r>
-              <a:rPr lang="en-US" sz="1200" b="1" spc="200" kern="0" dirty="0">
+            <a:pPr marL="0" indent="0">
+              <a:buNone/>
+            </a:pPr>
+            <a:r>
+              <a:rPr lang="en-US" sz="1200" b="1" kern="0" spc="200" dirty="0">
                 <a:solidFill>
                   <a:srgbClr val="64748B"/>
                 </a:solidFill>
@@ -8501,9 +8668,6 @@
               </a:rPr>
               <a:t>ENCODER  </a:t>
             </a:r>
-            <a:pPr indent="0" marL="0">
-              <a:buNone/>
-            </a:pPr>
             <a:r>
               <a:rPr lang="en-US" sz="1200" dirty="0">
                 <a:solidFill>
@@ -8540,7 +8704,7 @@
           <a:bodyPr wrap="square" lIns="0" tIns="0" rIns="0" bIns="0" rtlCol="0" anchor="ctr"/>
           <a:lstStyle/>
           <a:p>
-            <a:pPr indent="0" marL="0">
+            <a:pPr marL="0" indent="0">
               <a:buNone/>
             </a:pPr>
             <a:r>
@@ -8557,7 +8721,7 @@
             <a:endParaRPr lang="en-US" sz="1300" dirty="0"/>
           </a:p>
           <a:p>
-            <a:pPr indent="0" marL="0">
+            <a:pPr marL="0" indent="0">
               <a:buNone/>
             </a:pPr>
             <a:r>
@@ -8594,6 +8758,13 @@
           </a:solidFill>
           <a:ln/>
         </p:spPr>
+        <p:txBody>
+          <a:bodyPr/>
+          <a:lstStyle/>
+          <a:p>
+            <a:endParaRPr lang="zh-CN" altLang="en-US"/>
+          </a:p>
+        </p:txBody>
       </p:sp>
       <p:sp>
         <p:nvSpPr>
@@ -8614,6 +8785,13 @@
           </a:solidFill>
           <a:ln/>
         </p:spPr>
+        <p:txBody>
+          <a:bodyPr/>
+          <a:lstStyle/>
+          <a:p>
+            <a:endParaRPr lang="zh-CN" altLang="en-US"/>
+          </a:p>
+        </p:txBody>
       </p:sp>
       <p:sp>
         <p:nvSpPr>
@@ -8636,11 +8814,11 @@
           <a:bodyPr wrap="square" lIns="0" tIns="0" rIns="0" bIns="0" rtlCol="0" anchor="ctr"/>
           <a:lstStyle/>
           <a:p>
-            <a:pPr indent="0" marL="0">
-              <a:buNone/>
-            </a:pPr>
-            <a:r>
-              <a:rPr lang="en-US" sz="1100" b="1" spc="300" kern="0" dirty="0">
+            <a:pPr marL="0" indent="0">
+              <a:buNone/>
+            </a:pPr>
+            <a:r>
+              <a:rPr lang="en-US" sz="1100" b="1" kern="0" spc="300" dirty="0">
                 <a:solidFill>
                   <a:srgbClr val="3B82F6"/>
                 </a:solidFill>
@@ -8675,7 +8853,7 @@
           <a:bodyPr wrap="square" lIns="0" tIns="0" rIns="0" bIns="0" rtlCol="0" anchor="ctr"/>
           <a:lstStyle/>
           <a:p>
-            <a:pPr indent="0" marL="0">
+            <a:pPr marL="0" indent="0">
               <a:buNone/>
             </a:pPr>
             <a:r>
@@ -8714,11 +8892,11 @@
           <a:bodyPr wrap="square" lIns="0" tIns="0" rIns="0" bIns="0" rtlCol="0" anchor="ctr"/>
           <a:lstStyle/>
           <a:p>
-            <a:pPr indent="0" marL="0">
-              <a:buNone/>
-            </a:pPr>
-            <a:r>
-              <a:rPr lang="en-US" sz="1200" b="1" spc="200" kern="0" dirty="0">
+            <a:pPr marL="0" indent="0">
+              <a:buNone/>
+            </a:pPr>
+            <a:r>
+              <a:rPr lang="en-US" sz="1200" b="1" kern="0" spc="200" dirty="0">
                 <a:solidFill>
                   <a:srgbClr val="64748B"/>
                 </a:solidFill>
@@ -8728,9 +8906,6 @@
               </a:rPr>
               <a:t>ENCODER  </a:t>
             </a:r>
-            <a:pPr indent="0" marL="0">
-              <a:buNone/>
-            </a:pPr>
             <a:r>
               <a:rPr lang="en-US" sz="1200" dirty="0">
                 <a:solidFill>
@@ -8767,7 +8942,7 @@
           <a:bodyPr wrap="square" lIns="0" tIns="0" rIns="0" bIns="0" rtlCol="0" anchor="ctr"/>
           <a:lstStyle/>
           <a:p>
-            <a:pPr indent="0" marL="0">
+            <a:pPr marL="0" indent="0">
               <a:buNone/>
             </a:pPr>
             <a:r>
@@ -8784,7 +8959,7 @@
             <a:endParaRPr lang="en-US" sz="1300" dirty="0"/>
           </a:p>
           <a:p>
-            <a:pPr indent="0" marL="0">
+            <a:pPr marL="0" indent="0">
               <a:buNone/>
             </a:pPr>
             <a:r>
@@ -8821,6 +8996,13 @@
           </a:solidFill>
           <a:ln/>
         </p:spPr>
+        <p:txBody>
+          <a:bodyPr/>
+          <a:lstStyle/>
+          <a:p>
+            <a:endParaRPr lang="zh-CN" altLang="en-US"/>
+          </a:p>
+        </p:txBody>
       </p:sp>
       <p:sp>
         <p:nvSpPr>
@@ -8841,6 +9023,13 @@
           </a:solidFill>
           <a:ln/>
         </p:spPr>
+        <p:txBody>
+          <a:bodyPr/>
+          <a:lstStyle/>
+          <a:p>
+            <a:endParaRPr lang="zh-CN" altLang="en-US"/>
+          </a:p>
+        </p:txBody>
       </p:sp>
       <p:sp>
         <p:nvSpPr>
@@ -8863,11 +9052,11 @@
           <a:bodyPr wrap="square" lIns="0" tIns="0" rIns="0" bIns="0" rtlCol="0" anchor="ctr"/>
           <a:lstStyle/>
           <a:p>
-            <a:pPr indent="0" marL="0">
-              <a:buNone/>
-            </a:pPr>
-            <a:r>
-              <a:rPr lang="en-US" sz="1100" b="1" spc="300" kern="0" dirty="0">
+            <a:pPr marL="0" indent="0">
+              <a:buNone/>
+            </a:pPr>
+            <a:r>
+              <a:rPr lang="en-US" sz="1100" b="1" kern="0" spc="300" dirty="0">
                 <a:solidFill>
                   <a:srgbClr val="F59E0B"/>
                 </a:solidFill>
@@ -8902,7 +9091,7 @@
           <a:bodyPr wrap="square" lIns="0" tIns="0" rIns="0" bIns="0" rtlCol="0" anchor="ctr"/>
           <a:lstStyle/>
           <a:p>
-            <a:pPr indent="0" marL="0">
+            <a:pPr marL="0" indent="0">
               <a:buNone/>
             </a:pPr>
             <a:r>
@@ -8941,11 +9130,11 @@
           <a:bodyPr wrap="square" lIns="0" tIns="0" rIns="0" bIns="0" rtlCol="0" anchor="ctr"/>
           <a:lstStyle/>
           <a:p>
-            <a:pPr indent="0" marL="0">
-              <a:buNone/>
-            </a:pPr>
-            <a:r>
-              <a:rPr lang="en-US" sz="1200" b="1" spc="200" kern="0" dirty="0">
+            <a:pPr marL="0" indent="0">
+              <a:buNone/>
+            </a:pPr>
+            <a:r>
+              <a:rPr lang="en-US" sz="1200" b="1" kern="0" spc="200" dirty="0">
                 <a:solidFill>
                   <a:srgbClr val="64748B"/>
                 </a:solidFill>
@@ -8955,9 +9144,6 @@
               </a:rPr>
               <a:t>ENCODER  </a:t>
             </a:r>
-            <a:pPr indent="0" marL="0">
-              <a:buNone/>
-            </a:pPr>
             <a:r>
               <a:rPr lang="en-US" sz="1200" dirty="0">
                 <a:solidFill>
@@ -8994,7 +9180,7 @@
           <a:bodyPr wrap="square" lIns="0" tIns="0" rIns="0" bIns="0" rtlCol="0" anchor="ctr"/>
           <a:lstStyle/>
           <a:p>
-            <a:pPr indent="0" marL="0">
+            <a:pPr marL="0" indent="0">
               <a:buNone/>
             </a:pPr>
             <a:r>
@@ -9011,7 +9197,7 @@
             <a:endParaRPr lang="en-US" sz="1300" dirty="0"/>
           </a:p>
           <a:p>
-            <a:pPr indent="0" marL="0">
+            <a:pPr marL="0" indent="0">
               <a:buNone/>
             </a:pPr>
             <a:r>
@@ -9048,6 +9234,13 @@
           </a:solidFill>
           <a:ln/>
         </p:spPr>
+        <p:txBody>
+          <a:bodyPr/>
+          <a:lstStyle/>
+          <a:p>
+            <a:endParaRPr lang="zh-CN" altLang="en-US"/>
+          </a:p>
+        </p:txBody>
       </p:sp>
       <p:sp>
         <p:nvSpPr>
@@ -9068,6 +9261,13 @@
           </a:solidFill>
           <a:ln/>
         </p:spPr>
+        <p:txBody>
+          <a:bodyPr/>
+          <a:lstStyle/>
+          <a:p>
+            <a:endParaRPr lang="zh-CN" altLang="en-US"/>
+          </a:p>
+        </p:txBody>
       </p:sp>
       <p:sp>
         <p:nvSpPr>
@@ -9090,11 +9290,11 @@
           <a:bodyPr wrap="square" lIns="0" tIns="0" rIns="0" bIns="0" rtlCol="0" anchor="ctr"/>
           <a:lstStyle/>
           <a:p>
-            <a:pPr indent="0" marL="0">
-              <a:buNone/>
-            </a:pPr>
-            <a:r>
-              <a:rPr lang="en-US" sz="1100" b="1" spc="300" kern="0" dirty="0">
+            <a:pPr marL="0" indent="0">
+              <a:buNone/>
+            </a:pPr>
+            <a:r>
+              <a:rPr lang="en-US" sz="1100" b="1" kern="0" spc="300" dirty="0">
                 <a:solidFill>
                   <a:srgbClr val="10B981"/>
                 </a:solidFill>
@@ -9129,7 +9329,7 @@
           <a:bodyPr wrap="square" lIns="0" tIns="0" rIns="0" bIns="0" rtlCol="0" anchor="ctr"/>
           <a:lstStyle/>
           <a:p>
-            <a:pPr indent="0" marL="0">
+            <a:pPr marL="0" indent="0">
               <a:buNone/>
             </a:pPr>
             <a:r>
@@ -9168,11 +9368,11 @@
           <a:bodyPr wrap="square" lIns="0" tIns="0" rIns="0" bIns="0" rtlCol="0" anchor="ctr"/>
           <a:lstStyle/>
           <a:p>
-            <a:pPr indent="0" marL="0">
-              <a:buNone/>
-            </a:pPr>
-            <a:r>
-              <a:rPr lang="en-US" sz="1200" b="1" spc="200" kern="0" dirty="0">
+            <a:pPr marL="0" indent="0">
+              <a:buNone/>
+            </a:pPr>
+            <a:r>
+              <a:rPr lang="en-US" sz="1200" b="1" kern="0" spc="200" dirty="0">
                 <a:solidFill>
                   <a:srgbClr val="64748B"/>
                 </a:solidFill>
@@ -9182,9 +9382,6 @@
               </a:rPr>
               <a:t>ENCODER  </a:t>
             </a:r>
-            <a:pPr indent="0" marL="0">
-              <a:buNone/>
-            </a:pPr>
             <a:r>
               <a:rPr lang="en-US" sz="1200" dirty="0">
                 <a:solidFill>
@@ -9221,7 +9418,7 @@
           <a:bodyPr wrap="square" lIns="0" tIns="0" rIns="0" bIns="0" rtlCol="0" anchor="ctr"/>
           <a:lstStyle/>
           <a:p>
-            <a:pPr indent="0" marL="0">
+            <a:pPr marL="0" indent="0">
               <a:buNone/>
             </a:pPr>
             <a:r>
@@ -9238,7 +9435,7 @@
             <a:endParaRPr lang="en-US" sz="1300" dirty="0"/>
           </a:p>
           <a:p>
-            <a:pPr indent="0" marL="0">
+            <a:pPr marL="0" indent="0">
               <a:buNone/>
             </a:pPr>
             <a:r>
@@ -9272,6 +9469,7 @@
         <a:solidFill>
           <a:srgbClr val="FFFFFF"/>
         </a:solidFill>
+        <a:effectLst/>
       </p:bgPr>
     </p:bg>
     <p:spTree>
@@ -9309,7 +9507,7 @@
           <a:bodyPr wrap="square" lIns="0" tIns="0" rIns="0" bIns="0" rtlCol="0" anchor="ctr"/>
           <a:lstStyle/>
           <a:p>
-            <a:pPr indent="0" marL="0">
+            <a:pPr marL="0" indent="0">
               <a:buNone/>
             </a:pPr>
             <a:r>
@@ -9348,7 +9546,7 @@
           <a:bodyPr wrap="square" lIns="0" tIns="0" rIns="0" bIns="0" rtlCol="0" anchor="ctr"/>
           <a:lstStyle/>
           <a:p>
-            <a:pPr indent="0" marL="0">
+            <a:pPr marL="0" indent="0">
               <a:buNone/>
             </a:pPr>
             <a:r>
@@ -9390,6 +9588,13 @@
             <a:prstDash val="solid"/>
           </a:ln>
         </p:spPr>
+        <p:txBody>
+          <a:bodyPr/>
+          <a:lstStyle/>
+          <a:p>
+            <a:endParaRPr lang="zh-CN" altLang="en-US"/>
+          </a:p>
+        </p:txBody>
       </p:sp>
       <p:sp>
         <p:nvSpPr>
@@ -9412,11 +9617,11 @@
           <a:bodyPr wrap="square" lIns="0" tIns="0" rIns="0" bIns="0" rtlCol="0" anchor="ctr"/>
           <a:lstStyle/>
           <a:p>
-            <a:pPr indent="0" marL="0">
-              <a:buNone/>
-            </a:pPr>
-            <a:r>
-              <a:rPr lang="en-US" sz="1200" b="1" spc="400" kern="0" dirty="0">
+            <a:pPr marL="0" indent="0">
+              <a:buNone/>
+            </a:pPr>
+            <a:r>
+              <a:rPr lang="en-US" sz="1200" b="1" kern="0" spc="400" dirty="0">
                 <a:solidFill>
                   <a:srgbClr val="3B82F6"/>
                 </a:solidFill>
@@ -9451,7 +9656,7 @@
           <a:bodyPr wrap="square" lIns="0" tIns="0" rIns="0" bIns="0" rtlCol="0" anchor="ctr"/>
           <a:lstStyle/>
           <a:p>
-            <a:pPr indent="0" marL="0">
+            <a:pPr marL="0" indent="0">
               <a:buNone/>
             </a:pPr>
             <a:r>
@@ -9490,7 +9695,7 @@
           <a:bodyPr wrap="square" lIns="0" tIns="0" rIns="0" bIns="0" rtlCol="0" anchor="ctr"/>
           <a:lstStyle/>
           <a:p>
-            <a:pPr indent="0" marL="0">
+            <a:pPr marL="0" indent="0">
               <a:spcAft>
                 <a:spcPts val="400"/>
               </a:spcAft>
@@ -9510,7 +9715,7 @@
             <a:endParaRPr lang="en-US" sz="1300" dirty="0"/>
           </a:p>
           <a:p>
-            <a:pPr indent="0" marL="0">
+            <a:pPr marL="0" indent="0">
               <a:spcAft>
                 <a:spcPts val="400"/>
               </a:spcAft>
@@ -9530,7 +9735,7 @@
             <a:endParaRPr lang="en-US" sz="1300" dirty="0"/>
           </a:p>
           <a:p>
-            <a:pPr indent="0" marL="0">
+            <a:pPr marL="0" indent="0">
               <a:spcAft>
                 <a:spcPts val="400"/>
               </a:spcAft>
@@ -9550,7 +9755,7 @@
             <a:endParaRPr lang="en-US" sz="1300" dirty="0"/>
           </a:p>
           <a:p>
-            <a:pPr indent="0" marL="0">
+            <a:pPr marL="0" indent="0">
               <a:spcAft>
                 <a:spcPts val="400"/>
               </a:spcAft>
@@ -9559,7 +9764,7 @@
             <a:endParaRPr lang="en-US" sz="1300" dirty="0"/>
           </a:p>
           <a:p>
-            <a:pPr indent="0" marL="0">
+            <a:pPr marL="0" indent="0">
               <a:spcAft>
                 <a:spcPts val="400"/>
               </a:spcAft>
@@ -9576,12 +9781,6 @@
               </a:rPr>
               <a:t>Why? </a:t>
             </a:r>
-            <a:pPr indent="0" marL="0">
-              <a:spcAft>
-                <a:spcPts val="400"/>
-              </a:spcAft>
-              <a:buNone/>
-            </a:pPr>
             <a:r>
               <a:rPr lang="en-US" sz="1300" i="1" dirty="0">
                 <a:solidFill>
@@ -9618,7 +9817,7 @@
           <a:bodyPr wrap="square" lIns="0" tIns="0" rIns="0" bIns="0" rtlCol="0" anchor="ctr"/>
           <a:lstStyle/>
           <a:p>
-            <a:pPr algn="ctr" indent="0" marL="0">
+            <a:pPr marL="0" indent="0" algn="ctr">
               <a:buNone/>
             </a:pPr>
             <a:r>
@@ -9660,6 +9859,13 @@
             <a:prstDash val="solid"/>
           </a:ln>
         </p:spPr>
+        <p:txBody>
+          <a:bodyPr/>
+          <a:lstStyle/>
+          <a:p>
+            <a:endParaRPr lang="zh-CN" altLang="en-US"/>
+          </a:p>
+        </p:txBody>
       </p:sp>
       <p:sp>
         <p:nvSpPr>
@@ -9682,11 +9888,11 @@
           <a:bodyPr wrap="square" lIns="0" tIns="0" rIns="0" bIns="0" rtlCol="0" anchor="ctr"/>
           <a:lstStyle/>
           <a:p>
-            <a:pPr indent="0" marL="0">
-              <a:buNone/>
-            </a:pPr>
-            <a:r>
-              <a:rPr lang="en-US" sz="1200" b="1" spc="400" kern="0" dirty="0">
+            <a:pPr marL="0" indent="0">
+              <a:buNone/>
+            </a:pPr>
+            <a:r>
+              <a:rPr lang="en-US" sz="1200" b="1" kern="0" spc="400" dirty="0">
                 <a:solidFill>
                   <a:srgbClr val="F59E0B"/>
                 </a:solidFill>
@@ -9721,7 +9927,7 @@
           <a:bodyPr wrap="square" lIns="0" tIns="0" rIns="0" bIns="0" rtlCol="0" anchor="ctr"/>
           <a:lstStyle/>
           <a:p>
-            <a:pPr indent="0" marL="0">
+            <a:pPr marL="0" indent="0">
               <a:buNone/>
             </a:pPr>
             <a:r>
@@ -9760,7 +9966,7 @@
           <a:bodyPr wrap="square" lIns="0" tIns="0" rIns="0" bIns="0" rtlCol="0" anchor="ctr"/>
           <a:lstStyle/>
           <a:p>
-            <a:pPr indent="0" marL="0">
+            <a:pPr marL="0" indent="0">
               <a:spcAft>
                 <a:spcPts val="400"/>
               </a:spcAft>
@@ -9780,7 +9986,7 @@
             <a:endParaRPr lang="en-US" sz="1300" dirty="0"/>
           </a:p>
           <a:p>
-            <a:pPr indent="0" marL="0">
+            <a:pPr marL="0" indent="0">
               <a:spcAft>
                 <a:spcPts val="400"/>
               </a:spcAft>
@@ -9800,7 +10006,7 @@
             <a:endParaRPr lang="en-US" sz="1300" dirty="0"/>
           </a:p>
           <a:p>
-            <a:pPr indent="0" marL="0">
+            <a:pPr marL="0" indent="0">
               <a:spcAft>
                 <a:spcPts val="400"/>
               </a:spcAft>
@@ -9820,7 +10026,7 @@
             <a:endParaRPr lang="en-US" sz="1300" dirty="0"/>
           </a:p>
           <a:p>
-            <a:pPr indent="0" marL="0">
+            <a:pPr marL="0" indent="0">
               <a:spcAft>
                 <a:spcPts val="400"/>
               </a:spcAft>
@@ -9829,7 +10035,7 @@
             <a:endParaRPr lang="en-US" sz="1300" dirty="0"/>
           </a:p>
           <a:p>
-            <a:pPr indent="0" marL="0">
+            <a:pPr marL="0" indent="0">
               <a:spcAft>
                 <a:spcPts val="400"/>
               </a:spcAft>
@@ -9846,12 +10052,6 @@
               </a:rPr>
               <a:t>Why? </a:t>
             </a:r>
-            <a:pPr indent="0" marL="0">
-              <a:spcAft>
-                <a:spcPts val="400"/>
-              </a:spcAft>
-              <a:buNone/>
-            </a:pPr>
             <a:r>
               <a:rPr lang="en-US" sz="1300" i="1" dirty="0">
                 <a:solidFill>
@@ -9886,6 +10086,13 @@
           </a:solidFill>
           <a:ln/>
         </p:spPr>
+        <p:txBody>
+          <a:bodyPr/>
+          <a:lstStyle/>
+          <a:p>
+            <a:endParaRPr lang="zh-CN" altLang="en-US"/>
+          </a:p>
+        </p:txBody>
       </p:sp>
       <p:sp>
         <p:nvSpPr>
@@ -9908,7 +10115,7 @@
           <a:bodyPr wrap="square" lIns="0" tIns="0" rIns="0" bIns="0" rtlCol="0" anchor="ctr"/>
           <a:lstStyle/>
           <a:p>
-            <a:pPr indent="0" marL="0">
+            <a:pPr marL="0" indent="0">
               <a:buNone/>
             </a:pPr>
             <a:r>
@@ -9947,7 +10154,7 @@
           <a:bodyPr wrap="square" lIns="0" tIns="0" rIns="0" bIns="0" rtlCol="0" anchor="ctr"/>
           <a:lstStyle/>
           <a:p>
-            <a:pPr indent="0" marL="0">
+            <a:pPr marL="0" indent="0">
               <a:buNone/>
             </a:pPr>
             <a:r>
@@ -9981,6 +10188,7 @@
         <a:solidFill>
           <a:srgbClr val="FFFFFF"/>
         </a:solidFill>
+        <a:effectLst/>
       </p:bgPr>
     </p:bg>
     <p:spTree>
@@ -10018,7 +10226,7 @@
           <a:bodyPr wrap="square" lIns="0" tIns="0" rIns="0" bIns="0" rtlCol="0" anchor="ctr"/>
           <a:lstStyle/>
           <a:p>
-            <a:pPr indent="0" marL="0">
+            <a:pPr marL="0" indent="0">
               <a:buNone/>
             </a:pPr>
             <a:r>
@@ -10038,7 +10246,7 @@
       </p:sp>
       <p:graphicFrame>
         <p:nvGraphicFramePr>
-          <p:cNvPr id="3" name="Chart 0" descr=""/>
+          <p:cNvPr id="3" name="Chart 0"/>
           <p:cNvGraphicFramePr/>
           <p:nvPr/>
         </p:nvGraphicFramePr>
@@ -10046,9 +10254,9 @@
           <a:off x="548640" y="1280160"/>
           <a:ext cx="7772400" cy="5029200"/>
         </p:xfrm>
-        <a:graphic xmlns:a="http://schemas.openxmlformats.org/drawingml/2006/main">
+        <a:graphic>
           <a:graphicData uri="http://schemas.openxmlformats.org/drawingml/2006/chart">
-            <c:chart xmlns:c="http://schemas.openxmlformats.org/drawingml/2006/chart" r:id="rId1"/>
+            <c:chart xmlns:c="http://schemas.openxmlformats.org/drawingml/2006/chart" xmlns:r="http://schemas.openxmlformats.org/officeDocument/2006/relationships" r:id="rId3"/>
           </a:graphicData>
         </a:graphic>
       </p:graphicFrame>
@@ -10071,6 +10279,13 @@
           </a:solidFill>
           <a:ln/>
         </p:spPr>
+        <p:txBody>
+          <a:bodyPr/>
+          <a:lstStyle/>
+          <a:p>
+            <a:endParaRPr lang="zh-CN" altLang="en-US"/>
+          </a:p>
+        </p:txBody>
       </p:sp>
       <p:sp>
         <p:nvSpPr>
@@ -10093,11 +10308,11 @@
           <a:bodyPr wrap="square" lIns="0" tIns="0" rIns="0" bIns="0" rtlCol="0" anchor="ctr"/>
           <a:lstStyle/>
           <a:p>
-            <a:pPr indent="0" marL="0">
-              <a:buNone/>
-            </a:pPr>
-            <a:r>
-              <a:rPr lang="en-US" sz="1100" b="1" spc="200" kern="0" dirty="0">
+            <a:pPr marL="0" indent="0">
+              <a:buNone/>
+            </a:pPr>
+            <a:r>
+              <a:rPr lang="en-US" sz="1100" b="1" kern="0" spc="200" dirty="0">
                 <a:solidFill>
                   <a:srgbClr val="1E2761"/>
                 </a:solidFill>
@@ -10132,7 +10347,7 @@
           <a:bodyPr wrap="square" lIns="0" tIns="0" rIns="0" bIns="0" rtlCol="0" anchor="ctr"/>
           <a:lstStyle/>
           <a:p>
-            <a:pPr indent="0" marL="0">
+            <a:pPr marL="0" indent="0">
               <a:buNone/>
             </a:pPr>
             <a:r>
@@ -10171,7 +10386,7 @@
           <a:bodyPr wrap="square" lIns="0" tIns="0" rIns="0" bIns="0" rtlCol="0" anchor="ctr"/>
           <a:lstStyle/>
           <a:p>
-            <a:pPr indent="0" marL="0">
+            <a:pPr marL="0" indent="0">
               <a:buNone/>
             </a:pPr>
             <a:r>
@@ -10211,6 +10426,13 @@
             <a:prstDash val="solid"/>
           </a:ln>
         </p:spPr>
+        <p:txBody>
+          <a:bodyPr/>
+          <a:lstStyle/>
+          <a:p>
+            <a:endParaRPr lang="zh-CN" altLang="en-US"/>
+          </a:p>
+        </p:txBody>
       </p:sp>
       <p:sp>
         <p:nvSpPr>
@@ -10233,7 +10455,7 @@
           <a:bodyPr wrap="square" lIns="0" tIns="0" rIns="0" bIns="0" rtlCol="0" anchor="ctr"/>
           <a:lstStyle/>
           <a:p>
-            <a:pPr indent="0" marL="0">
+            <a:pPr marL="0" indent="0">
               <a:buNone/>
             </a:pPr>
             <a:r>
@@ -10272,7 +10494,7 @@
           <a:bodyPr wrap="square" lIns="0" tIns="0" rIns="0" bIns="0" rtlCol="0" anchor="ctr"/>
           <a:lstStyle/>
           <a:p>
-            <a:pPr indent="0" marL="0">
+            <a:pPr marL="0" indent="0">
               <a:buNone/>
             </a:pPr>
             <a:r>
@@ -10312,6 +10534,13 @@
             <a:prstDash val="solid"/>
           </a:ln>
         </p:spPr>
+        <p:txBody>
+          <a:bodyPr/>
+          <a:lstStyle/>
+          <a:p>
+            <a:endParaRPr lang="zh-CN" altLang="en-US"/>
+          </a:p>
+        </p:txBody>
       </p:sp>
       <p:sp>
         <p:nvSpPr>
@@ -10334,7 +10563,7 @@
           <a:bodyPr wrap="square" lIns="0" tIns="0" rIns="0" bIns="0" rtlCol="0" anchor="ctr"/>
           <a:lstStyle/>
           <a:p>
-            <a:pPr indent="0" marL="0">
+            <a:pPr marL="0" indent="0">
               <a:buNone/>
             </a:pPr>
             <a:r>
@@ -10373,7 +10602,7 @@
           <a:bodyPr wrap="square" lIns="0" tIns="0" rIns="0" bIns="0" rtlCol="0" anchor="ctr"/>
           <a:lstStyle/>
           <a:p>
-            <a:pPr indent="0" marL="0">
+            <a:pPr marL="0" indent="0">
               <a:buNone/>
             </a:pPr>
             <a:r>
@@ -10692,4 +10921,319 @@
     </a:ext>
   </a:extLst>
 </a:theme>
+</file>
+
+<file path=ppt/theme/theme2.xml><?xml version="1.0" encoding="utf-8"?>
+<a:theme xmlns:a="http://schemas.openxmlformats.org/drawingml/2006/main" name="Office 主题​​">
+  <a:themeElements>
+    <a:clrScheme name="Office">
+      <a:dk1>
+        <a:sysClr val="windowText" lastClr="000000"/>
+      </a:dk1>
+      <a:lt1>
+        <a:sysClr val="window" lastClr="FFFFFF"/>
+      </a:lt1>
+      <a:dk2>
+        <a:srgbClr val="0E2841"/>
+      </a:dk2>
+      <a:lt2>
+        <a:srgbClr val="E8E8E8"/>
+      </a:lt2>
+      <a:accent1>
+        <a:srgbClr val="156082"/>
+      </a:accent1>
+      <a:accent2>
+        <a:srgbClr val="E97132"/>
+      </a:accent2>
+      <a:accent3>
+        <a:srgbClr val="196B24"/>
+      </a:accent3>
+      <a:accent4>
+        <a:srgbClr val="0F9ED5"/>
+      </a:accent4>
+      <a:accent5>
+        <a:srgbClr val="A02B93"/>
+      </a:accent5>
+      <a:accent6>
+        <a:srgbClr val="4EA72E"/>
+      </a:accent6>
+      <a:hlink>
+        <a:srgbClr val="467886"/>
+      </a:hlink>
+      <a:folHlink>
+        <a:srgbClr val="96607D"/>
+      </a:folHlink>
+    </a:clrScheme>
+    <a:fontScheme name="Office">
+      <a:majorFont>
+        <a:latin typeface="等线 Light" panose="02110004020202020204"/>
+        <a:ea typeface=""/>
+        <a:cs typeface=""/>
+        <a:font script="Jpan" typeface="游ゴシック Light"/>
+        <a:font script="Hang" typeface="맑은 고딕"/>
+        <a:font script="Hans" typeface="等线 Light"/>
+        <a:font script="Hant" typeface="新細明體"/>
+        <a:font script="Arab" typeface="Times New Roman"/>
+        <a:font script="Hebr" typeface="Times New Roman"/>
+        <a:font script="Thai" typeface="Angsana New"/>
+        <a:font script="Ethi" typeface="Nyala"/>
+        <a:font script="Beng" typeface="Vrinda"/>
+        <a:font script="Gujr" typeface="Shruti"/>
+        <a:font script="Khmr" typeface="MoolBoran"/>
+        <a:font script="Knda" typeface="Tunga"/>
+        <a:font script="Guru" typeface="Raavi"/>
+        <a:font script="Cans" typeface="Euphemia"/>
+        <a:font script="Cher" typeface="Plantagenet Cherokee"/>
+        <a:font script="Yiii" typeface="Microsoft Yi Baiti"/>
+        <a:font script="Tibt" typeface="Microsoft Himalaya"/>
+        <a:font script="Thaa" typeface="MV Boli"/>
+        <a:font script="Deva" typeface="Mangal"/>
+        <a:font script="Telu" typeface="Gautami"/>
+        <a:font script="Taml" typeface="Latha"/>
+        <a:font script="Syrc" typeface="Estrangelo Edessa"/>
+        <a:font script="Orya" typeface="Kalinga"/>
+        <a:font script="Mlym" typeface="Kartika"/>
+        <a:font script="Laoo" typeface="DokChampa"/>
+        <a:font script="Sinh" typeface="Iskoola Pota"/>
+        <a:font script="Mong" typeface="Mongolian Baiti"/>
+        <a:font script="Viet" typeface="Times New Roman"/>
+        <a:font script="Uigh" typeface="Microsoft Uighur"/>
+        <a:font script="Geor" typeface="Sylfaen"/>
+        <a:font script="Armn" typeface="Arial"/>
+        <a:font script="Bugi" typeface="Leelawadee UI"/>
+        <a:font script="Bopo" typeface="Microsoft JhengHei"/>
+        <a:font script="Java" typeface="Javanese Text"/>
+        <a:font script="Lisu" typeface="Segoe UI"/>
+        <a:font script="Mymr" typeface="Myanmar Text"/>
+        <a:font script="Nkoo" typeface="Ebrima"/>
+        <a:font script="Olck" typeface="Nirmala UI"/>
+        <a:font script="Osma" typeface="Ebrima"/>
+        <a:font script="Phag" typeface="Phagspa"/>
+        <a:font script="Syrn" typeface="Estrangelo Edessa"/>
+        <a:font script="Syrj" typeface="Estrangelo Edessa"/>
+        <a:font script="Syre" typeface="Estrangelo Edessa"/>
+        <a:font script="Sora" typeface="Nirmala UI"/>
+        <a:font script="Tale" typeface="Microsoft Tai Le"/>
+        <a:font script="Talu" typeface="Microsoft New Tai Lue"/>
+        <a:font script="Tfng" typeface="Ebrima"/>
+      </a:majorFont>
+      <a:minorFont>
+        <a:latin typeface="等线" panose="02110004020202020204"/>
+        <a:ea typeface=""/>
+        <a:cs typeface=""/>
+        <a:font script="Jpan" typeface="游ゴシック"/>
+        <a:font script="Hang" typeface="맑은 고딕"/>
+        <a:font script="Hans" typeface="等线"/>
+        <a:font script="Hant" typeface="新細明體"/>
+        <a:font script="Arab" typeface="Arial"/>
+        <a:font script="Hebr" typeface="Arial"/>
+        <a:font script="Thai" typeface="Cordia New"/>
+        <a:font script="Ethi" typeface="Nyala"/>
+        <a:font script="Beng" typeface="Vrinda"/>
+        <a:font script="Gujr" typeface="Shruti"/>
+        <a:font script="Khmr" typeface="DaunPenh"/>
+        <a:font script="Knda" typeface="Tunga"/>
+        <a:font script="Guru" typeface="Raavi"/>
+        <a:font script="Cans" typeface="Euphemia"/>
+        <a:font script="Cher" typeface="Plantagenet Cherokee"/>
+        <a:font script="Yiii" typeface="Microsoft Yi Baiti"/>
+        <a:font script="Tibt" typeface="Microsoft Himalaya"/>
+        <a:font script="Thaa" typeface="MV Boli"/>
+        <a:font script="Deva" typeface="Mangal"/>
+        <a:font script="Telu" typeface="Gautami"/>
+        <a:font script="Taml" typeface="Latha"/>
+        <a:font script="Syrc" typeface="Estrangelo Edessa"/>
+        <a:font script="Orya" typeface="Kalinga"/>
+        <a:font script="Mlym" typeface="Kartika"/>
+        <a:font script="Laoo" typeface="DokChampa"/>
+        <a:font script="Sinh" typeface="Iskoola Pota"/>
+        <a:font script="Mong" typeface="Mongolian Baiti"/>
+        <a:font script="Viet" typeface="Arial"/>
+        <a:font script="Uigh" typeface="Microsoft Uighur"/>
+        <a:font script="Geor" typeface="Sylfaen"/>
+        <a:font script="Armn" typeface="Arial"/>
+        <a:font script="Bugi" typeface="Leelawadee UI"/>
+        <a:font script="Bopo" typeface="Microsoft JhengHei"/>
+        <a:font script="Java" typeface="Javanese Text"/>
+        <a:font script="Lisu" typeface="Segoe UI"/>
+        <a:font script="Mymr" typeface="Myanmar Text"/>
+        <a:font script="Nkoo" typeface="Ebrima"/>
+        <a:font script="Olck" typeface="Nirmala UI"/>
+        <a:font script="Osma" typeface="Ebrima"/>
+        <a:font script="Phag" typeface="Phagspa"/>
+        <a:font script="Syrn" typeface="Estrangelo Edessa"/>
+        <a:font script="Syrj" typeface="Estrangelo Edessa"/>
+        <a:font script="Syre" typeface="Estrangelo Edessa"/>
+        <a:font script="Sora" typeface="Nirmala UI"/>
+        <a:font script="Tale" typeface="Microsoft Tai Le"/>
+        <a:font script="Talu" typeface="Microsoft New Tai Lue"/>
+        <a:font script="Tfng" typeface="Ebrima"/>
+      </a:minorFont>
+    </a:fontScheme>
+    <a:fmtScheme name="Office">
+      <a:fillStyleLst>
+        <a:solidFill>
+          <a:schemeClr val="phClr"/>
+        </a:solidFill>
+        <a:gradFill rotWithShape="1">
+          <a:gsLst>
+            <a:gs pos="0">
+              <a:schemeClr val="phClr">
+                <a:lumMod val="110000"/>
+                <a:satMod val="105000"/>
+                <a:tint val="67000"/>
+              </a:schemeClr>
+            </a:gs>
+            <a:gs pos="50000">
+              <a:schemeClr val="phClr">
+                <a:lumMod val="105000"/>
+                <a:satMod val="103000"/>
+                <a:tint val="73000"/>
+              </a:schemeClr>
+            </a:gs>
+            <a:gs pos="100000">
+              <a:schemeClr val="phClr">
+                <a:lumMod val="105000"/>
+                <a:satMod val="109000"/>
+                <a:tint val="81000"/>
+              </a:schemeClr>
+            </a:gs>
+          </a:gsLst>
+          <a:lin ang="5400000" scaled="0"/>
+        </a:gradFill>
+        <a:gradFill rotWithShape="1">
+          <a:gsLst>
+            <a:gs pos="0">
+              <a:schemeClr val="phClr">
+                <a:satMod val="103000"/>
+                <a:lumMod val="102000"/>
+                <a:tint val="94000"/>
+              </a:schemeClr>
+            </a:gs>
+            <a:gs pos="50000">
+              <a:schemeClr val="phClr">
+                <a:satMod val="110000"/>
+                <a:lumMod val="100000"/>
+                <a:shade val="100000"/>
+              </a:schemeClr>
+            </a:gs>
+            <a:gs pos="100000">
+              <a:schemeClr val="phClr">
+                <a:lumMod val="99000"/>
+                <a:satMod val="120000"/>
+                <a:shade val="78000"/>
+              </a:schemeClr>
+            </a:gs>
+          </a:gsLst>
+          <a:lin ang="5400000" scaled="0"/>
+        </a:gradFill>
+      </a:fillStyleLst>
+      <a:lnStyleLst>
+        <a:ln w="12700" cap="flat" cmpd="sng" algn="ctr">
+          <a:solidFill>
+            <a:schemeClr val="phClr"/>
+          </a:solidFill>
+          <a:prstDash val="solid"/>
+          <a:miter lim="800000"/>
+        </a:ln>
+        <a:ln w="19050" cap="flat" cmpd="sng" algn="ctr">
+          <a:solidFill>
+            <a:schemeClr val="phClr"/>
+          </a:solidFill>
+          <a:prstDash val="solid"/>
+          <a:miter lim="800000"/>
+        </a:ln>
+        <a:ln w="25400" cap="flat" cmpd="sng" algn="ctr">
+          <a:solidFill>
+            <a:schemeClr val="phClr"/>
+          </a:solidFill>
+          <a:prstDash val="solid"/>
+          <a:miter lim="800000"/>
+        </a:ln>
+      </a:lnStyleLst>
+      <a:effectStyleLst>
+        <a:effectStyle>
+          <a:effectLst/>
+        </a:effectStyle>
+        <a:effectStyle>
+          <a:effectLst/>
+        </a:effectStyle>
+        <a:effectStyle>
+          <a:effectLst>
+            <a:outerShdw blurRad="57150" dist="19050" dir="5400000" algn="ctr" rotWithShape="0">
+              <a:srgbClr val="000000">
+                <a:alpha val="63000"/>
+              </a:srgbClr>
+            </a:outerShdw>
+          </a:effectLst>
+        </a:effectStyle>
+      </a:effectStyleLst>
+      <a:bgFillStyleLst>
+        <a:solidFill>
+          <a:schemeClr val="phClr"/>
+        </a:solidFill>
+        <a:solidFill>
+          <a:schemeClr val="phClr">
+            <a:tint val="95000"/>
+            <a:satMod val="170000"/>
+          </a:schemeClr>
+        </a:solidFill>
+        <a:gradFill rotWithShape="1">
+          <a:gsLst>
+            <a:gs pos="0">
+              <a:schemeClr val="phClr">
+                <a:tint val="93000"/>
+                <a:satMod val="150000"/>
+                <a:shade val="98000"/>
+                <a:lumMod val="102000"/>
+              </a:schemeClr>
+            </a:gs>
+            <a:gs pos="50000">
+              <a:schemeClr val="phClr">
+                <a:tint val="98000"/>
+                <a:satMod val="130000"/>
+                <a:shade val="90000"/>
+                <a:lumMod val="103000"/>
+              </a:schemeClr>
+            </a:gs>
+            <a:gs pos="100000">
+              <a:schemeClr val="phClr">
+                <a:shade val="63000"/>
+                <a:satMod val="120000"/>
+              </a:schemeClr>
+            </a:gs>
+          </a:gsLst>
+          <a:lin ang="5400000" scaled="0"/>
+        </a:gradFill>
+      </a:bgFillStyleLst>
+    </a:fmtScheme>
+  </a:themeElements>
+  <a:objectDefaults>
+    <a:lnDef>
+      <a:spPr/>
+      <a:bodyPr/>
+      <a:lstStyle/>
+      <a:style>
+        <a:lnRef idx="2">
+          <a:schemeClr val="accent1"/>
+        </a:lnRef>
+        <a:fillRef idx="0">
+          <a:schemeClr val="accent1"/>
+        </a:fillRef>
+        <a:effectRef idx="1">
+          <a:schemeClr val="accent1"/>
+        </a:effectRef>
+        <a:fontRef idx="minor">
+          <a:schemeClr val="tx1"/>
+        </a:fontRef>
+      </a:style>
+    </a:lnDef>
+  </a:objectDefaults>
+  <a:extraClrSchemeLst/>
+  <a:extLst>
+    <a:ext uri="{05A4C25C-085E-4340-85A3-A5531E510DB2}">
+      <thm15:themeFamily xmlns:thm15="http://schemas.microsoft.com/office/thememl/2012/main" name="Office Theme" id="{2E142A2C-CD16-42D6-873A-C26D2A0506FA}" vid="{1BDDFF52-6CD6-40A5-AB3C-68EB2F1E4D0A}"/>
+    </a:ext>
+  </a:extLst>
+</a:theme>
 </file>